--- a/proposals/pineda-covalin-mobile-app/Pineda-Covalin-Pitch.pptx
+++ b/proposals/pineda-covalin-mobile-app/Pineda-Covalin-Pitch.pptx
@@ -27,6 +27,7 @@
     <p:sldId id="275" r:id="rId26"/>
     <p:sldId id="276" r:id="rId27"/>
     <p:sldId id="277" r:id="rId28"/>
+    <p:sldId id="278" r:id="rId29"/>
   </p:sldIdLst>
   <p:sldSz cx="12191695" cy="6858000" type="screen4x3"/>
   <p:notesSz cx="6858000" cy="9144000"/>
@@ -5182,7 +5183,7 @@
                 </a:solidFill>
                 <a:latin typeface="Calibri"/>
               </a:rPr>
-              <a:t>10 / 22</a:t>
+              <a:t>10 / 23</a:t>
             </a:r>
           </a:p>
         </p:txBody>
@@ -6633,7 +6634,7 @@
                 </a:solidFill>
                 <a:latin typeface="Calibri"/>
               </a:rPr>
-              <a:t>11 / 22</a:t>
+              <a:t>11 / 23</a:t>
             </a:r>
           </a:p>
         </p:txBody>
@@ -9028,7 +9029,7 @@
                 </a:solidFill>
                 <a:latin typeface="Calibri"/>
               </a:rPr>
-              <a:t>12 / 22</a:t>
+              <a:t>12 / 23</a:t>
             </a:r>
           </a:p>
         </p:txBody>
@@ -10502,7 +10503,7 @@
                 </a:solidFill>
                 <a:latin typeface="Calibri"/>
               </a:rPr>
-              <a:t>13 / 22</a:t>
+              <a:t>13 / 23</a:t>
             </a:r>
           </a:p>
         </p:txBody>
@@ -12374,7 +12375,7 @@
                 </a:solidFill>
                 <a:latin typeface="Calibri"/>
               </a:rPr>
-              <a:t>14 / 22</a:t>
+              <a:t>14 / 23</a:t>
             </a:r>
           </a:p>
         </p:txBody>
@@ -14047,7 +14048,7 @@
                 </a:solidFill>
                 <a:latin typeface="Calibri"/>
               </a:rPr>
-              <a:t>15 / 22</a:t>
+              <a:t>15 / 23</a:t>
             </a:r>
           </a:p>
         </p:txBody>
@@ -15228,7 +15229,7 @@
                 </a:solidFill>
                 <a:latin typeface="Calibri"/>
               </a:rPr>
-              <a:t>16 / 22</a:t>
+              <a:t>16 / 23</a:t>
             </a:r>
           </a:p>
         </p:txBody>
@@ -15325,7 +15326,7 @@
                 </a:solidFill>
                 <a:latin typeface="Calibri"/>
               </a:rPr>
-              <a:t>HOW WE'LL DELIVER</a:t>
+              <a:t>EL ESTUDIO · WEB ADMIN PORTAL</a:t>
             </a:r>
           </a:p>
         </p:txBody>
@@ -15360,7 +15361,7 @@
                 </a:solidFill>
                 <a:latin typeface="Georgia"/>
               </a:rPr>
-              <a:t>Roadmap — first nine months.</a:t>
+              <a:t>The internal twin of the mobile app.</a:t>
             </a:r>
           </a:p>
         </p:txBody>
@@ -15410,45 +15411,36 @@
       </p:sp>
       <p:sp>
         <p:nvSpPr>
-          <p:cNvPr id="6" name="Rectangle 5"/>
-          <p:cNvSpPr/>
-          <p:nvPr/>
-        </p:nvSpPr>
-        <p:spPr>
-          <a:xfrm>
-            <a:off x="548640" y="2743200"/>
-            <a:ext cx="11064240" cy="25400"/>
-          </a:xfrm>
-          <a:prstGeom prst="rect">
-            <a:avLst/>
-          </a:prstGeom>
-          <a:solidFill>
-            <a:srgbClr val="E6D9C0"/>
-          </a:solidFill>
-          <a:ln>
-            <a:noFill/>
-          </a:ln>
-          <a:effectLst/>
-        </p:spPr>
-        <p:style>
-          <a:lnRef idx="1">
-            <a:schemeClr val="accent1"/>
-          </a:lnRef>
-          <a:fillRef idx="3">
-            <a:schemeClr val="accent1"/>
-          </a:fillRef>
-          <a:effectRef idx="2">
-            <a:schemeClr val="accent1"/>
-          </a:effectRef>
-          <a:fontRef idx="minor">
-            <a:schemeClr val="lt1"/>
-          </a:fontRef>
-        </p:style>
-        <p:txBody>
-          <a:bodyPr rtlCol="0" anchor="ctr"/>
-          <a:lstStyle/>
-          <a:p>
-            <a:pPr algn="ctr"/>
+          <p:cNvPr id="6" name="TextBox 5"/>
+          <p:cNvSpPr txBox="1"/>
+          <p:nvPr/>
+        </p:nvSpPr>
+        <p:spPr>
+          <a:xfrm>
+            <a:off x="548640" y="1920240"/>
+            <a:ext cx="10972800" cy="731520"/>
+          </a:xfrm>
+          <a:prstGeom prst="rect">
+            <a:avLst/>
+          </a:prstGeom>
+          <a:noFill/>
+        </p:spPr>
+        <p:txBody>
+          <a:bodyPr wrap="square" lIns="0" rIns="0" tIns="0" bIns="0" anchor="t">
+            <a:spAutoFit/>
+          </a:bodyPr>
+          <a:lstStyle/>
+          <a:p>
+            <a:pPr algn="l"/>
+            <a:r>
+              <a:rPr sz="1400" b="0">
+                <a:solidFill>
+                  <a:srgbClr val="8A7866"/>
+                </a:solidFill>
+                <a:latin typeface="Calibri"/>
+              </a:rPr>
+              <a:t>The customer uses the mobile app. Your team uses El Estudio. Same backend, same brand language — different surface for different users.</a:t>
+            </a:r>
           </a:p>
         </p:txBody>
       </p:sp>
@@ -15460,54 +15452,8 @@
         </p:nvSpPr>
         <p:spPr>
           <a:xfrm>
-            <a:off x="1828800" y="2651760"/>
-            <a:ext cx="182880" cy="182880"/>
-          </a:xfrm>
-          <a:prstGeom prst="roundRect">
-            <a:avLst>
-              <a:gd name="adj" fmla="val 12000"/>
-            </a:avLst>
-          </a:prstGeom>
-          <a:solidFill>
-            <a:srgbClr val="A02747"/>
-          </a:solidFill>
-          <a:ln>
-            <a:noFill/>
-          </a:ln>
-          <a:effectLst/>
-        </p:spPr>
-        <p:style>
-          <a:lnRef idx="1">
-            <a:schemeClr val="accent1"/>
-          </a:lnRef>
-          <a:fillRef idx="3">
-            <a:schemeClr val="accent1"/>
-          </a:fillRef>
-          <a:effectRef idx="2">
-            <a:schemeClr val="accent1"/>
-          </a:effectRef>
-          <a:fontRef idx="minor">
-            <a:schemeClr val="lt1"/>
-          </a:fontRef>
-        </p:style>
-        <p:txBody>
-          <a:bodyPr rtlCol="0" anchor="ctr"/>
-          <a:lstStyle/>
-          <a:p>
-            <a:pPr algn="ctr"/>
-          </a:p>
-        </p:txBody>
-      </p:sp>
-      <p:sp>
-        <p:nvSpPr>
-          <p:cNvPr id="8" name="Rounded Rectangle 7"/>
-          <p:cNvSpPr/>
-          <p:nvPr/>
-        </p:nvSpPr>
-        <p:spPr>
-          <a:xfrm>
-            <a:off x="548640" y="3063240"/>
-            <a:ext cx="2743200" cy="3291840"/>
+            <a:off x="4114800" y="2743200"/>
+            <a:ext cx="3931920" cy="777240"/>
           </a:xfrm>
           <a:prstGeom prst="roundRect">
             <a:avLst>
@@ -15548,84 +15494,49 @@
       </p:sp>
       <p:sp>
         <p:nvSpPr>
+          <p:cNvPr id="8" name="TextBox 7"/>
+          <p:cNvSpPr txBox="1"/>
+          <p:nvPr/>
+        </p:nvSpPr>
+        <p:spPr>
+          <a:xfrm>
+            <a:off x="4297680" y="2788920"/>
+            <a:ext cx="3566160" cy="365760"/>
+          </a:xfrm>
+          <a:prstGeom prst="rect">
+            <a:avLst/>
+          </a:prstGeom>
+          <a:noFill/>
+        </p:spPr>
+        <p:txBody>
+          <a:bodyPr wrap="square" lIns="0" rIns="0" tIns="0" bIns="0" anchor="t">
+            <a:spAutoFit/>
+          </a:bodyPr>
+          <a:lstStyle/>
+          <a:p>
+            <a:pPr algn="l"/>
+            <a:r>
+              <a:rPr sz="1000" b="1">
+                <a:solidFill>
+                  <a:srgbClr val="A02747"/>
+                </a:solidFill>
+                <a:latin typeface="Calibri"/>
+              </a:rPr>
+              <a:t>SHOPIFY / VTEX</a:t>
+            </a:r>
+          </a:p>
+        </p:txBody>
+      </p:sp>
+      <p:sp>
+        <p:nvSpPr>
           <p:cNvPr id="9" name="TextBox 8"/>
           <p:cNvSpPr txBox="1"/>
           <p:nvPr/>
         </p:nvSpPr>
         <p:spPr>
           <a:xfrm>
-            <a:off x="822960" y="3200400"/>
-            <a:ext cx="2194560" cy="365760"/>
-          </a:xfrm>
-          <a:prstGeom prst="rect">
-            <a:avLst/>
-          </a:prstGeom>
-          <a:noFill/>
-        </p:spPr>
-        <p:txBody>
-          <a:bodyPr wrap="square" lIns="0" rIns="0" tIns="0" bIns="0" anchor="t">
-            <a:spAutoFit/>
-          </a:bodyPr>
-          <a:lstStyle/>
-          <a:p>
-            <a:pPr algn="l"/>
-            <a:r>
-              <a:rPr sz="1000" b="1">
-                <a:solidFill>
-                  <a:srgbClr val="A02747"/>
-                </a:solidFill>
-                <a:latin typeface="Calibri"/>
-              </a:rPr>
-              <a:t>Weeks 1–2</a:t>
-            </a:r>
-          </a:p>
-        </p:txBody>
-      </p:sp>
-      <p:sp>
-        <p:nvSpPr>
-          <p:cNvPr id="10" name="TextBox 9"/>
-          <p:cNvSpPr txBox="1"/>
-          <p:nvPr/>
-        </p:nvSpPr>
-        <p:spPr>
-          <a:xfrm>
-            <a:off x="822960" y="3566160"/>
-            <a:ext cx="2194560" cy="548640"/>
-          </a:xfrm>
-          <a:prstGeom prst="rect">
-            <a:avLst/>
-          </a:prstGeom>
-          <a:noFill/>
-        </p:spPr>
-        <p:txBody>
-          <a:bodyPr wrap="square" lIns="0" rIns="0" tIns="0" bIns="0" anchor="t">
-            <a:spAutoFit/>
-          </a:bodyPr>
-          <a:lstStyle/>
-          <a:p>
-            <a:pPr algn="l"/>
-            <a:r>
-              <a:rPr sz="2200" b="0">
-                <a:solidFill>
-                  <a:srgbClr val="2A1A14"/>
-                </a:solidFill>
-                <a:latin typeface="Georgia"/>
-              </a:rPr>
-              <a:t>Discovery</a:t>
-            </a:r>
-          </a:p>
-        </p:txBody>
-      </p:sp>
-      <p:sp>
-        <p:nvSpPr>
-          <p:cNvPr id="11" name="TextBox 10"/>
-          <p:cNvSpPr txBox="1"/>
-          <p:nvPr/>
-        </p:nvSpPr>
-        <p:spPr>
-          <a:xfrm>
-            <a:off x="822960" y="4389120"/>
-            <a:ext cx="2194560" cy="1828800"/>
+            <a:off x="4297680" y="3108960"/>
+            <a:ext cx="3566160" cy="365760"/>
           </a:xfrm>
           <a:prstGeom prst="rect">
             <a:avLst/>
@@ -15646,21 +15557,21 @@
                 </a:solidFill>
                 <a:latin typeface="Calibri"/>
               </a:rPr>
-              <a:t>Customer interviews (tourist, collector, corporate gifter, EU buyer, US buyer). Audit existing data. Lock Phase 1 scope. Brand language workshop.</a:t>
-            </a:r>
-          </a:p>
-        </p:txBody>
-      </p:sp>
-      <p:sp>
-        <p:nvSpPr>
-          <p:cNvPr id="12" name="Rounded Rectangle 11"/>
+              <a:t>Catalog · orders · payments — unchanged</a:t>
+            </a:r>
+          </a:p>
+        </p:txBody>
+      </p:sp>
+      <p:sp>
+        <p:nvSpPr>
+          <p:cNvPr id="10" name="Rounded Rectangle 9"/>
           <p:cNvSpPr/>
           <p:nvPr/>
         </p:nvSpPr>
         <p:spPr>
           <a:xfrm>
-            <a:off x="4617720" y="2651760"/>
-            <a:ext cx="182880" cy="182880"/>
+            <a:off x="548640" y="3840480"/>
+            <a:ext cx="11064240" cy="640080"/>
           </a:xfrm>
           <a:prstGeom prst="roundRect">
             <a:avLst>
@@ -15668,7 +15579,7 @@
             </a:avLst>
           </a:prstGeom>
           <a:solidFill>
-            <a:srgbClr val="A02747"/>
+            <a:srgbClr val="F7E0D8"/>
           </a:solidFill>
           <a:ln>
             <a:noFill/>
@@ -15699,14 +15610,49 @@
       </p:sp>
       <p:sp>
         <p:nvSpPr>
-          <p:cNvPr id="13" name="Rounded Rectangle 12"/>
+          <p:cNvPr id="11" name="TextBox 10"/>
+          <p:cNvSpPr txBox="1"/>
+          <p:nvPr/>
+        </p:nvSpPr>
+        <p:spPr>
+          <a:xfrm>
+            <a:off x="777240" y="3904487"/>
+            <a:ext cx="10607040" cy="365760"/>
+          </a:xfrm>
+          <a:prstGeom prst="rect">
+            <a:avLst/>
+          </a:prstGeom>
+          <a:noFill/>
+        </p:spPr>
+        <p:txBody>
+          <a:bodyPr wrap="square" lIns="0" rIns="0" tIns="0" bIns="0" anchor="ctr">
+            <a:spAutoFit/>
+          </a:bodyPr>
+          <a:lstStyle/>
+          <a:p>
+            <a:pPr algn="l"/>
+            <a:r>
+              <a:rPr sz="1100" b="1">
+                <a:solidFill>
+                  <a:srgbClr val="A02747"/>
+                </a:solidFill>
+                <a:latin typeface="Calibri"/>
+              </a:rPr>
+              <a:t>SHARED API · Postgres · Auth · AI gateway · Object storage</a:t>
+            </a:r>
+          </a:p>
+        </p:txBody>
+      </p:sp>
+      <p:sp>
+        <p:nvSpPr>
+          <p:cNvPr id="12" name="Rounded Rectangle 11"/>
           <p:cNvSpPr/>
           <p:nvPr/>
         </p:nvSpPr>
         <p:spPr>
           <a:xfrm>
-            <a:off x="3337560" y="3063240"/>
-            <a:ext cx="2743200" cy="3291840"/>
+            <a:off x="548640" y="4754880"/>
+            <a:ext cx="5440680" cy="1463040"/>
           </a:xfrm>
           <a:prstGeom prst="roundRect">
             <a:avLst>
@@ -15747,119 +15693,14 @@
       </p:sp>
       <p:sp>
         <p:nvSpPr>
-          <p:cNvPr id="14" name="TextBox 13"/>
-          <p:cNvSpPr txBox="1"/>
-          <p:nvPr/>
-        </p:nvSpPr>
-        <p:spPr>
-          <a:xfrm>
-            <a:off x="3611880" y="3200400"/>
-            <a:ext cx="2194560" cy="365760"/>
-          </a:xfrm>
-          <a:prstGeom prst="rect">
-            <a:avLst/>
-          </a:prstGeom>
-          <a:noFill/>
-        </p:spPr>
-        <p:txBody>
-          <a:bodyPr wrap="square" lIns="0" rIns="0" tIns="0" bIns="0" anchor="t">
-            <a:spAutoFit/>
-          </a:bodyPr>
-          <a:lstStyle/>
-          <a:p>
-            <a:pPr algn="l"/>
-            <a:r>
-              <a:rPr sz="1000" b="1">
-                <a:solidFill>
-                  <a:srgbClr val="A02747"/>
-                </a:solidFill>
-                <a:latin typeface="Calibri"/>
-              </a:rPr>
-              <a:t>Weeks 3–16</a:t>
-            </a:r>
-          </a:p>
-        </p:txBody>
-      </p:sp>
-      <p:sp>
-        <p:nvSpPr>
-          <p:cNvPr id="15" name="TextBox 14"/>
-          <p:cNvSpPr txBox="1"/>
-          <p:nvPr/>
-        </p:nvSpPr>
-        <p:spPr>
-          <a:xfrm>
-            <a:off x="3611880" y="3566160"/>
-            <a:ext cx="2194560" cy="548640"/>
-          </a:xfrm>
-          <a:prstGeom prst="rect">
-            <a:avLst/>
-          </a:prstGeom>
-          <a:noFill/>
-        </p:spPr>
-        <p:txBody>
-          <a:bodyPr wrap="square" lIns="0" rIns="0" tIns="0" bIns="0" anchor="t">
-            <a:spAutoFit/>
-          </a:bodyPr>
-          <a:lstStyle/>
-          <a:p>
-            <a:pPr algn="l"/>
-            <a:r>
-              <a:rPr sz="2200" b="0">
-                <a:solidFill>
-                  <a:srgbClr val="2A1A14"/>
-                </a:solidFill>
-                <a:latin typeface="Georgia"/>
-              </a:rPr>
-              <a:t>Phase 1 build</a:t>
-            </a:r>
-          </a:p>
-        </p:txBody>
-      </p:sp>
-      <p:sp>
-        <p:nvSpPr>
-          <p:cNvPr id="16" name="TextBox 15"/>
-          <p:cNvSpPr txBox="1"/>
-          <p:nvPr/>
-        </p:nvSpPr>
-        <p:spPr>
-          <a:xfrm>
-            <a:off x="3611880" y="4389120"/>
-            <a:ext cx="2194560" cy="1828800"/>
-          </a:xfrm>
-          <a:prstGeom prst="rect">
-            <a:avLst/>
-          </a:prstGeom>
-          <a:noFill/>
-        </p:spPr>
-        <p:txBody>
-          <a:bodyPr wrap="square" lIns="0" rIns="0" tIns="0" bIns="0" anchor="t">
-            <a:spAutoFit/>
-          </a:bodyPr>
-          <a:lstStyle/>
-          <a:p>
-            <a:pPr algn="l"/>
-            <a:r>
-              <a:rPr sz="1100" b="0">
-                <a:solidFill>
-                  <a:srgbClr val="8A7866"/>
-                </a:solidFill>
-                <a:latin typeface="Calibri"/>
-              </a:rPr>
-              <a:t>Atelier, Mercado, Gift, Traveler, Archive. EN/ES at launch. Tier 1 AI. Soft launch from Polanco studio.</a:t>
-            </a:r>
-          </a:p>
-        </p:txBody>
-      </p:sp>
-      <p:sp>
-        <p:nvSpPr>
-          <p:cNvPr id="17" name="Rounded Rectangle 16"/>
+          <p:cNvPr id="13" name="Rounded Rectangle 12"/>
           <p:cNvSpPr/>
           <p:nvPr/>
         </p:nvSpPr>
         <p:spPr>
           <a:xfrm>
-            <a:off x="7406640" y="2651760"/>
-            <a:ext cx="182880" cy="182880"/>
+            <a:off x="548640" y="4754880"/>
+            <a:ext cx="5440680" cy="365760"/>
           </a:xfrm>
           <a:prstGeom prst="roundRect">
             <a:avLst>
@@ -15898,14 +15739,84 @@
       </p:sp>
       <p:sp>
         <p:nvSpPr>
-          <p:cNvPr id="18" name="Rounded Rectangle 17"/>
+          <p:cNvPr id="14" name="TextBox 13"/>
+          <p:cNvSpPr txBox="1"/>
+          <p:nvPr/>
+        </p:nvSpPr>
+        <p:spPr>
+          <a:xfrm>
+            <a:off x="777240" y="4773168"/>
+            <a:ext cx="4983480" cy="365760"/>
+          </a:xfrm>
+          <a:prstGeom prst="rect">
+            <a:avLst/>
+          </a:prstGeom>
+          <a:noFill/>
+        </p:spPr>
+        <p:txBody>
+          <a:bodyPr wrap="square" lIns="0" rIns="0" tIns="0" bIns="0" anchor="ctr">
+            <a:spAutoFit/>
+          </a:bodyPr>
+          <a:lstStyle/>
+          <a:p>
+            <a:pPr algn="l"/>
+            <a:r>
+              <a:rPr sz="1000" b="1">
+                <a:solidFill>
+                  <a:srgbClr val="FFFFFF"/>
+                </a:solidFill>
+                <a:latin typeface="Calibri"/>
+              </a:rPr>
+              <a:t>MOBILE APP — IOS &amp; ANDROID</a:t>
+            </a:r>
+          </a:p>
+        </p:txBody>
+      </p:sp>
+      <p:sp>
+        <p:nvSpPr>
+          <p:cNvPr id="15" name="TextBox 14"/>
+          <p:cNvSpPr txBox="1"/>
+          <p:nvPr/>
+        </p:nvSpPr>
+        <p:spPr>
+          <a:xfrm>
+            <a:off x="777240" y="5212080"/>
+            <a:ext cx="4983480" cy="914400"/>
+          </a:xfrm>
+          <a:prstGeom prst="rect">
+            <a:avLst/>
+          </a:prstGeom>
+          <a:noFill/>
+        </p:spPr>
+        <p:txBody>
+          <a:bodyPr wrap="square" lIns="0" rIns="0" tIns="0" bIns="0" anchor="t">
+            <a:spAutoFit/>
+          </a:bodyPr>
+          <a:lstStyle/>
+          <a:p>
+            <a:pPr algn="l"/>
+            <a:r>
+              <a:rPr sz="1100" b="0">
+                <a:solidFill>
+                  <a:srgbClr val="2A1A14"/>
+                </a:solidFill>
+                <a:latin typeface="Calibri"/>
+              </a:rPr>
+              <a:t>Customer-facing · Atelier · Mercado · Gift Concierge · Traveler · Collector's Archive · El Docente</a:t>
+            </a:r>
+          </a:p>
+        </p:txBody>
+      </p:sp>
+      <p:sp>
+        <p:nvSpPr>
+          <p:cNvPr id="16" name="Rounded Rectangle 15"/>
           <p:cNvSpPr/>
           <p:nvPr/>
         </p:nvSpPr>
         <p:spPr>
           <a:xfrm>
-            <a:off x="6126480" y="3063240"/>
-            <a:ext cx="2743200" cy="3291840"/>
+            <a:off x="6172200" y="4754880"/>
+            <a:ext cx="5440680" cy="1463040"/>
           </a:xfrm>
           <a:prstGeom prst="roundRect">
             <a:avLst>
@@ -15946,119 +15857,14 @@
       </p:sp>
       <p:sp>
         <p:nvSpPr>
-          <p:cNvPr id="19" name="TextBox 18"/>
-          <p:cNvSpPr txBox="1"/>
-          <p:nvPr/>
-        </p:nvSpPr>
-        <p:spPr>
-          <a:xfrm>
-            <a:off x="6400800" y="3200400"/>
-            <a:ext cx="2194560" cy="365760"/>
-          </a:xfrm>
-          <a:prstGeom prst="rect">
-            <a:avLst/>
-          </a:prstGeom>
-          <a:noFill/>
-        </p:spPr>
-        <p:txBody>
-          <a:bodyPr wrap="square" lIns="0" rIns="0" tIns="0" bIns="0" anchor="t">
-            <a:spAutoFit/>
-          </a:bodyPr>
-          <a:lstStyle/>
-          <a:p>
-            <a:pPr algn="l"/>
-            <a:r>
-              <a:rPr sz="1000" b="1">
-                <a:solidFill>
-                  <a:srgbClr val="A02747"/>
-                </a:solidFill>
-                <a:latin typeface="Calibri"/>
-              </a:rPr>
-              <a:t>Weeks 17–32</a:t>
-            </a:r>
-          </a:p>
-        </p:txBody>
-      </p:sp>
-      <p:sp>
-        <p:nvSpPr>
-          <p:cNvPr id="20" name="TextBox 19"/>
-          <p:cNvSpPr txBox="1"/>
-          <p:nvPr/>
-        </p:nvSpPr>
-        <p:spPr>
-          <a:xfrm>
-            <a:off x="6400800" y="3566160"/>
-            <a:ext cx="2194560" cy="548640"/>
-          </a:xfrm>
-          <a:prstGeom prst="rect">
-            <a:avLst/>
-          </a:prstGeom>
-          <a:noFill/>
-        </p:spPr>
-        <p:txBody>
-          <a:bodyPr wrap="square" lIns="0" rIns="0" tIns="0" bIns="0" anchor="t">
-            <a:spAutoFit/>
-          </a:bodyPr>
-          <a:lstStyle/>
-          <a:p>
-            <a:pPr algn="l"/>
-            <a:r>
-              <a:rPr sz="2200" b="0">
-                <a:solidFill>
-                  <a:srgbClr val="2A1A14"/>
-                </a:solidFill>
-                <a:latin typeface="Georgia"/>
-              </a:rPr>
-              <a:t>Phase 2 build</a:t>
-            </a:r>
-          </a:p>
-        </p:txBody>
-      </p:sp>
-      <p:sp>
-        <p:nvSpPr>
-          <p:cNvPr id="21" name="TextBox 20"/>
-          <p:cNvSpPr txBox="1"/>
-          <p:nvPr/>
-        </p:nvSpPr>
-        <p:spPr>
-          <a:xfrm>
-            <a:off x="6400800" y="4389120"/>
-            <a:ext cx="2194560" cy="1828800"/>
-          </a:xfrm>
-          <a:prstGeom prst="rect">
-            <a:avLst/>
-          </a:prstGeom>
-          <a:noFill/>
-        </p:spPr>
-        <p:txBody>
-          <a:bodyPr wrap="square" lIns="0" rIns="0" tIns="0" bIns="0" anchor="t">
-            <a:spAutoFit/>
-          </a:bodyPr>
-          <a:lstStyle/>
-          <a:p>
-            <a:pPr algn="l"/>
-            <a:r>
-              <a:rPr sz="1100" b="0">
-                <a:solidFill>
-                  <a:srgbClr val="8A7866"/>
-                </a:solidFill>
-                <a:latin typeface="Calibri"/>
-              </a:rPr>
-              <a:t>AR try-on, photo authenticity, corporate gifting portal, gift-narration video. Add FR/JP/ZH languages.</a:t>
-            </a:r>
-          </a:p>
-        </p:txBody>
-      </p:sp>
-      <p:sp>
-        <p:nvSpPr>
-          <p:cNvPr id="22" name="Rounded Rectangle 21"/>
+          <p:cNvPr id="17" name="Rounded Rectangle 16"/>
           <p:cNvSpPr/>
           <p:nvPr/>
         </p:nvSpPr>
         <p:spPr>
           <a:xfrm>
-            <a:off x="10195560" y="2651760"/>
-            <a:ext cx="182880" cy="182880"/>
+            <a:off x="6172200" y="4754880"/>
+            <a:ext cx="5440680" cy="365760"/>
           </a:xfrm>
           <a:prstGeom prst="roundRect">
             <a:avLst>
@@ -16066,7 +15872,7 @@
             </a:avLst>
           </a:prstGeom>
           <a:solidFill>
-            <a:srgbClr val="A02747"/>
+            <a:srgbClr val="2A1A14"/>
           </a:solidFill>
           <a:ln>
             <a:noFill/>
@@ -16097,70 +15903,22 @@
       </p:sp>
       <p:sp>
         <p:nvSpPr>
-          <p:cNvPr id="23" name="Rounded Rectangle 22"/>
-          <p:cNvSpPr/>
-          <p:nvPr/>
-        </p:nvSpPr>
-        <p:spPr>
-          <a:xfrm>
-            <a:off x="8915400" y="3063240"/>
-            <a:ext cx="2743200" cy="3291840"/>
-          </a:xfrm>
-          <a:prstGeom prst="roundRect">
-            <a:avLst>
-              <a:gd name="adj" fmla="val 12000"/>
-            </a:avLst>
-          </a:prstGeom>
-          <a:solidFill>
-            <a:srgbClr val="FFFFFF"/>
-          </a:solidFill>
-          <a:ln w="9525">
-            <a:solidFill>
-              <a:srgbClr val="E6D9C0"/>
-            </a:solidFill>
-          </a:ln>
-          <a:effectLst/>
-        </p:spPr>
-        <p:style>
-          <a:lnRef idx="1">
-            <a:schemeClr val="accent1"/>
-          </a:lnRef>
-          <a:fillRef idx="3">
-            <a:schemeClr val="accent1"/>
-          </a:fillRef>
-          <a:effectRef idx="2">
-            <a:schemeClr val="accent1"/>
-          </a:effectRef>
-          <a:fontRef idx="minor">
-            <a:schemeClr val="lt1"/>
-          </a:fontRef>
-        </p:style>
-        <p:txBody>
-          <a:bodyPr rtlCol="0" anchor="ctr"/>
-          <a:lstStyle/>
-          <a:p>
-            <a:pPr algn="ctr"/>
-          </a:p>
-        </p:txBody>
-      </p:sp>
-      <p:sp>
-        <p:nvSpPr>
-          <p:cNvPr id="24" name="TextBox 23"/>
-          <p:cNvSpPr txBox="1"/>
-          <p:nvPr/>
-        </p:nvSpPr>
-        <p:spPr>
-          <a:xfrm>
-            <a:off x="9189720" y="3200400"/>
-            <a:ext cx="2194560" cy="365760"/>
-          </a:xfrm>
-          <a:prstGeom prst="rect">
-            <a:avLst/>
-          </a:prstGeom>
-          <a:noFill/>
-        </p:spPr>
-        <p:txBody>
-          <a:bodyPr wrap="square" lIns="0" rIns="0" tIns="0" bIns="0" anchor="t">
+          <p:cNvPr id="18" name="TextBox 17"/>
+          <p:cNvSpPr txBox="1"/>
+          <p:nvPr/>
+        </p:nvSpPr>
+        <p:spPr>
+          <a:xfrm>
+            <a:off x="6400800" y="4773168"/>
+            <a:ext cx="4983480" cy="365760"/>
+          </a:xfrm>
+          <a:prstGeom prst="rect">
+            <a:avLst/>
+          </a:prstGeom>
+          <a:noFill/>
+        </p:spPr>
+        <p:txBody>
+          <a:bodyPr wrap="square" lIns="0" rIns="0" tIns="0" bIns="0" anchor="ctr">
             <a:spAutoFit/>
           </a:bodyPr>
           <a:lstStyle/>
@@ -16169,88 +15927,88 @@
             <a:r>
               <a:rPr sz="1000" b="1">
                 <a:solidFill>
+                  <a:srgbClr val="FFFFFF"/>
+                </a:solidFill>
+                <a:latin typeface="Calibri"/>
+              </a:rPr>
+              <a:t>EL ESTUDIO — WEB ADMIN PORTAL</a:t>
+            </a:r>
+          </a:p>
+        </p:txBody>
+      </p:sp>
+      <p:sp>
+        <p:nvSpPr>
+          <p:cNvPr id="19" name="TextBox 18"/>
+          <p:cNvSpPr txBox="1"/>
+          <p:nvPr/>
+        </p:nvSpPr>
+        <p:spPr>
+          <a:xfrm>
+            <a:off x="6400800" y="5212080"/>
+            <a:ext cx="4983480" cy="914400"/>
+          </a:xfrm>
+          <a:prstGeom prst="rect">
+            <a:avLst/>
+          </a:prstGeom>
+          <a:noFill/>
+        </p:spPr>
+        <p:txBody>
+          <a:bodyPr wrap="square" lIns="0" rIns="0" tIns="0" bIns="0" anchor="t">
+            <a:spAutoFit/>
+          </a:bodyPr>
+          <a:lstStyle/>
+          <a:p>
+            <a:pPr algn="l"/>
+            <a:r>
+              <a:rPr sz="1100" b="0">
+                <a:solidFill>
+                  <a:srgbClr val="2A1A14"/>
+                </a:solidFill>
+                <a:latin typeface="Calibri"/>
+              </a:rPr>
+              <a:t>Internal · Atelier editor · translation workflow · cultural calendar · concierge inbox · VIP admin · authenticity · analytics</a:t>
+            </a:r>
+          </a:p>
+        </p:txBody>
+      </p:sp>
+      <p:sp>
+        <p:nvSpPr>
+          <p:cNvPr id="20" name="TextBox 19"/>
+          <p:cNvSpPr txBox="1"/>
+          <p:nvPr/>
+        </p:nvSpPr>
+        <p:spPr>
+          <a:xfrm>
+            <a:off x="548640" y="6400800"/>
+            <a:ext cx="10972800" cy="365760"/>
+          </a:xfrm>
+          <a:prstGeom prst="rect">
+            <a:avLst/>
+          </a:prstGeom>
+          <a:noFill/>
+        </p:spPr>
+        <p:txBody>
+          <a:bodyPr wrap="square" lIns="0" rIns="0" tIns="0" bIns="0" anchor="t">
+            <a:spAutoFit/>
+          </a:bodyPr>
+          <a:lstStyle/>
+          <a:p>
+            <a:pPr algn="l"/>
+            <a:r>
+              <a:rPr sz="1000" b="1">
+                <a:solidFill>
                   <a:srgbClr val="A02747"/>
                 </a:solidFill>
                 <a:latin typeface="Calibri"/>
               </a:rPr>
-              <a:t>Weeks 33–40+</a:t>
-            </a:r>
-          </a:p>
-        </p:txBody>
-      </p:sp>
-      <p:sp>
-        <p:nvSpPr>
-          <p:cNvPr id="25" name="TextBox 24"/>
-          <p:cNvSpPr txBox="1"/>
-          <p:nvPr/>
-        </p:nvSpPr>
-        <p:spPr>
-          <a:xfrm>
-            <a:off x="9189720" y="3566160"/>
-            <a:ext cx="2194560" cy="548640"/>
-          </a:xfrm>
-          <a:prstGeom prst="rect">
-            <a:avLst/>
-          </a:prstGeom>
-          <a:noFill/>
-        </p:spPr>
-        <p:txBody>
-          <a:bodyPr wrap="square" lIns="0" rIns="0" tIns="0" bIns="0" anchor="t">
-            <a:spAutoFit/>
-          </a:bodyPr>
-          <a:lstStyle/>
-          <a:p>
-            <a:pPr algn="l"/>
-            <a:r>
-              <a:rPr sz="2200" b="0">
-                <a:solidFill>
-                  <a:srgbClr val="2A1A14"/>
-                </a:solidFill>
-                <a:latin typeface="Georgia"/>
-              </a:rPr>
-              <a:t>Phase 3 build</a:t>
-            </a:r>
-          </a:p>
-        </p:txBody>
-      </p:sp>
-      <p:sp>
-        <p:nvSpPr>
-          <p:cNvPr id="26" name="TextBox 25"/>
-          <p:cNvSpPr txBox="1"/>
-          <p:nvPr/>
-        </p:nvSpPr>
-        <p:spPr>
-          <a:xfrm>
-            <a:off x="9189720" y="4389120"/>
-            <a:ext cx="2194560" cy="1828800"/>
-          </a:xfrm>
-          <a:prstGeom prst="rect">
-            <a:avLst/>
-          </a:prstGeom>
-          <a:noFill/>
-        </p:spPr>
-        <p:txBody>
-          <a:bodyPr wrap="square" lIns="0" rIns="0" tIns="0" bIns="0" anchor="t">
-            <a:spAutoFit/>
-          </a:bodyPr>
-          <a:lstStyle/>
-          <a:p>
-            <a:pPr algn="l"/>
-            <a:r>
-              <a:rPr sz="1100" b="0">
-                <a:solidFill>
-                  <a:srgbClr val="8A7866"/>
-                </a:solidFill>
-                <a:latin typeface="Calibri"/>
-              </a:rPr>
-              <a:t>Editorial engine, atelier livestreams, AI bespoke concept, demand sensing.</a:t>
-            </a:r>
-          </a:p>
-        </p:txBody>
-      </p:sp>
-      <p:sp>
-        <p:nvSpPr>
-          <p:cNvPr id="27" name="TextBox 26"/>
+              <a:t>BUILT FOR YOUR TEAM   —   editors, curators, concierge, B2B managers, analysts. Bilingual ES/EN. Brand-palette UI.</a:t>
+            </a:r>
+          </a:p>
+        </p:txBody>
+      </p:sp>
+      <p:sp>
+        <p:nvSpPr>
+          <p:cNvPr id="21" name="TextBox 20"/>
           <p:cNvSpPr txBox="1"/>
           <p:nvPr/>
         </p:nvSpPr>
@@ -16285,7 +16043,7 @@
       </p:sp>
       <p:sp>
         <p:nvSpPr>
-          <p:cNvPr id="28" name="TextBox 27"/>
+          <p:cNvPr id="22" name="TextBox 21"/>
           <p:cNvSpPr txBox="1"/>
           <p:nvPr/>
         </p:nvSpPr>
@@ -16313,7 +16071,7 @@
                 </a:solidFill>
                 <a:latin typeface="Calibri"/>
               </a:rPr>
-              <a:t>17 / 22</a:t>
+              <a:t>17 / 23</a:t>
             </a:r>
           </a:p>
         </p:txBody>
@@ -16410,7 +16168,7 @@
                 </a:solidFill>
                 <a:latin typeface="Calibri"/>
               </a:rPr>
-              <a:t>HOW WE'LL KNOW IT'S WORKING</a:t>
+              <a:t>HOW WE'LL DELIVER</a:t>
             </a:r>
           </a:p>
         </p:txBody>
@@ -16445,7 +16203,7 @@
                 </a:solidFill>
                 <a:latin typeface="Georgia"/>
               </a:rPr>
-              <a:t>The metrics that matter.</a:t>
+              <a:t>Roadmap — first nine months.</a:t>
             </a:r>
           </a:p>
         </p:txBody>
@@ -16495,14 +16253,104 @@
       </p:sp>
       <p:sp>
         <p:nvSpPr>
-          <p:cNvPr id="6" name="Rounded Rectangle 5"/>
+          <p:cNvPr id="6" name="Rectangle 5"/>
           <p:cNvSpPr/>
           <p:nvPr/>
         </p:nvSpPr>
         <p:spPr>
           <a:xfrm>
-            <a:off x="548640" y="2560320"/>
-            <a:ext cx="3657600" cy="1828800"/>
+            <a:off x="548640" y="2743200"/>
+            <a:ext cx="11064240" cy="25400"/>
+          </a:xfrm>
+          <a:prstGeom prst="rect">
+            <a:avLst/>
+          </a:prstGeom>
+          <a:solidFill>
+            <a:srgbClr val="E6D9C0"/>
+          </a:solidFill>
+          <a:ln>
+            <a:noFill/>
+          </a:ln>
+          <a:effectLst/>
+        </p:spPr>
+        <p:style>
+          <a:lnRef idx="1">
+            <a:schemeClr val="accent1"/>
+          </a:lnRef>
+          <a:fillRef idx="3">
+            <a:schemeClr val="accent1"/>
+          </a:fillRef>
+          <a:effectRef idx="2">
+            <a:schemeClr val="accent1"/>
+          </a:effectRef>
+          <a:fontRef idx="minor">
+            <a:schemeClr val="lt1"/>
+          </a:fontRef>
+        </p:style>
+        <p:txBody>
+          <a:bodyPr rtlCol="0" anchor="ctr"/>
+          <a:lstStyle/>
+          <a:p>
+            <a:pPr algn="ctr"/>
+          </a:p>
+        </p:txBody>
+      </p:sp>
+      <p:sp>
+        <p:nvSpPr>
+          <p:cNvPr id="7" name="Rounded Rectangle 6"/>
+          <p:cNvSpPr/>
+          <p:nvPr/>
+        </p:nvSpPr>
+        <p:spPr>
+          <a:xfrm>
+            <a:off x="1828800" y="2651760"/>
+            <a:ext cx="182880" cy="182880"/>
+          </a:xfrm>
+          <a:prstGeom prst="roundRect">
+            <a:avLst>
+              <a:gd name="adj" fmla="val 12000"/>
+            </a:avLst>
+          </a:prstGeom>
+          <a:solidFill>
+            <a:srgbClr val="A02747"/>
+          </a:solidFill>
+          <a:ln>
+            <a:noFill/>
+          </a:ln>
+          <a:effectLst/>
+        </p:spPr>
+        <p:style>
+          <a:lnRef idx="1">
+            <a:schemeClr val="accent1"/>
+          </a:lnRef>
+          <a:fillRef idx="3">
+            <a:schemeClr val="accent1"/>
+          </a:fillRef>
+          <a:effectRef idx="2">
+            <a:schemeClr val="accent1"/>
+          </a:effectRef>
+          <a:fontRef idx="minor">
+            <a:schemeClr val="lt1"/>
+          </a:fontRef>
+        </p:style>
+        <p:txBody>
+          <a:bodyPr rtlCol="0" anchor="ctr"/>
+          <a:lstStyle/>
+          <a:p>
+            <a:pPr algn="ctr"/>
+          </a:p>
+        </p:txBody>
+      </p:sp>
+      <p:sp>
+        <p:nvSpPr>
+          <p:cNvPr id="8" name="Rounded Rectangle 7"/>
+          <p:cNvSpPr/>
+          <p:nvPr/>
+        </p:nvSpPr>
+        <p:spPr>
+          <a:xfrm>
+            <a:off x="548640" y="3063240"/>
+            <a:ext cx="2743200" cy="3291840"/>
           </a:xfrm>
           <a:prstGeom prst="roundRect">
             <a:avLst>
@@ -16543,49 +16391,84 @@
       </p:sp>
       <p:sp>
         <p:nvSpPr>
-          <p:cNvPr id="7" name="TextBox 6"/>
-          <p:cNvSpPr txBox="1"/>
-          <p:nvPr/>
-        </p:nvSpPr>
-        <p:spPr>
-          <a:xfrm>
-            <a:off x="822960" y="2743200"/>
-            <a:ext cx="3108960" cy="365760"/>
-          </a:xfrm>
-          <a:prstGeom prst="rect">
-            <a:avLst/>
-          </a:prstGeom>
-          <a:noFill/>
-        </p:spPr>
-        <p:txBody>
-          <a:bodyPr wrap="square" lIns="0" rIns="0" tIns="0" bIns="0" anchor="t">
-            <a:spAutoFit/>
-          </a:bodyPr>
-          <a:lstStyle/>
-          <a:p>
-            <a:pPr algn="l"/>
-            <a:r>
-              <a:rPr sz="1400" b="1">
+          <p:cNvPr id="9" name="TextBox 8"/>
+          <p:cNvSpPr txBox="1"/>
+          <p:nvPr/>
+        </p:nvSpPr>
+        <p:spPr>
+          <a:xfrm>
+            <a:off x="822960" y="3200400"/>
+            <a:ext cx="2194560" cy="365760"/>
+          </a:xfrm>
+          <a:prstGeom prst="rect">
+            <a:avLst/>
+          </a:prstGeom>
+          <a:noFill/>
+        </p:spPr>
+        <p:txBody>
+          <a:bodyPr wrap="square" lIns="0" rIns="0" tIns="0" bIns="0" anchor="t">
+            <a:spAutoFit/>
+          </a:bodyPr>
+          <a:lstStyle/>
+          <a:p>
+            <a:pPr algn="l"/>
+            <a:r>
+              <a:rPr sz="1000" b="1">
                 <a:solidFill>
                   <a:srgbClr val="A02747"/>
                 </a:solidFill>
                 <a:latin typeface="Calibri"/>
               </a:rPr>
-              <a:t>Tourist retention</a:t>
-            </a:r>
-          </a:p>
-        </p:txBody>
-      </p:sp>
-      <p:sp>
-        <p:nvSpPr>
-          <p:cNvPr id="8" name="TextBox 7"/>
-          <p:cNvSpPr txBox="1"/>
-          <p:nvPr/>
-        </p:nvSpPr>
-        <p:spPr>
-          <a:xfrm>
-            <a:off x="822960" y="3154680"/>
-            <a:ext cx="3108960" cy="822960"/>
+              <a:t>Weeks 1–2</a:t>
+            </a:r>
+          </a:p>
+        </p:txBody>
+      </p:sp>
+      <p:sp>
+        <p:nvSpPr>
+          <p:cNvPr id="10" name="TextBox 9"/>
+          <p:cNvSpPr txBox="1"/>
+          <p:nvPr/>
+        </p:nvSpPr>
+        <p:spPr>
+          <a:xfrm>
+            <a:off x="822960" y="3566160"/>
+            <a:ext cx="2194560" cy="548640"/>
+          </a:xfrm>
+          <a:prstGeom prst="rect">
+            <a:avLst/>
+          </a:prstGeom>
+          <a:noFill/>
+        </p:spPr>
+        <p:txBody>
+          <a:bodyPr wrap="square" lIns="0" rIns="0" tIns="0" bIns="0" anchor="t">
+            <a:spAutoFit/>
+          </a:bodyPr>
+          <a:lstStyle/>
+          <a:p>
+            <a:pPr algn="l"/>
+            <a:r>
+              <a:rPr sz="2200" b="0">
+                <a:solidFill>
+                  <a:srgbClr val="2A1A14"/>
+                </a:solidFill>
+                <a:latin typeface="Georgia"/>
+              </a:rPr>
+              <a:t>Discovery</a:t>
+            </a:r>
+          </a:p>
+        </p:txBody>
+      </p:sp>
+      <p:sp>
+        <p:nvSpPr>
+          <p:cNvPr id="11" name="TextBox 10"/>
+          <p:cNvSpPr txBox="1"/>
+          <p:nvPr/>
+        </p:nvSpPr>
+        <p:spPr>
+          <a:xfrm>
+            <a:off x="822960" y="4389120"/>
+            <a:ext cx="2194560" cy="1828800"/>
           </a:xfrm>
           <a:prstGeom prst="rect">
             <a:avLst/>
@@ -16606,56 +16489,67 @@
                 </a:solidFill>
                 <a:latin typeface="Calibri"/>
               </a:rPr>
-              <a:t>% of airport / museum buyers who install the app and register their piece within 90 days</a:t>
-            </a:r>
-          </a:p>
-        </p:txBody>
-      </p:sp>
-      <p:sp>
-        <p:nvSpPr>
-          <p:cNvPr id="9" name="TextBox 8"/>
-          <p:cNvSpPr txBox="1"/>
-          <p:nvPr/>
-        </p:nvSpPr>
-        <p:spPr>
-          <a:xfrm>
-            <a:off x="822960" y="3931920"/>
-            <a:ext cx="3108960" cy="365760"/>
-          </a:xfrm>
-          <a:prstGeom prst="rect">
-            <a:avLst/>
-          </a:prstGeom>
-          <a:noFill/>
-        </p:spPr>
-        <p:txBody>
-          <a:bodyPr wrap="square" lIns="0" rIns="0" tIns="0" bIns="0" anchor="t">
-            <a:spAutoFit/>
-          </a:bodyPr>
-          <a:lstStyle/>
-          <a:p>
-            <a:pPr algn="l"/>
-            <a:r>
-              <a:rPr sz="1400" b="0">
-                <a:solidFill>
-                  <a:srgbClr val="2A1A14"/>
-                </a:solidFill>
-                <a:latin typeface="Georgia"/>
-              </a:rPr>
-              <a:t>Target ≥ 35% by month 9</a:t>
-            </a:r>
-          </a:p>
-        </p:txBody>
-      </p:sp>
-      <p:sp>
-        <p:nvSpPr>
-          <p:cNvPr id="10" name="Rounded Rectangle 9"/>
+              <a:t>Customer interviews (tourist, collector, corporate gifter, EU buyer, US buyer). Audit existing data. Lock Phase 1 scope. Brand language workshop.</a:t>
+            </a:r>
+          </a:p>
+        </p:txBody>
+      </p:sp>
+      <p:sp>
+        <p:nvSpPr>
+          <p:cNvPr id="12" name="Rounded Rectangle 11"/>
           <p:cNvSpPr/>
           <p:nvPr/>
         </p:nvSpPr>
         <p:spPr>
           <a:xfrm>
-            <a:off x="4297680" y="2560320"/>
-            <a:ext cx="3657600" cy="1828800"/>
+            <a:off x="4617720" y="2651760"/>
+            <a:ext cx="182880" cy="182880"/>
+          </a:xfrm>
+          <a:prstGeom prst="roundRect">
+            <a:avLst>
+              <a:gd name="adj" fmla="val 12000"/>
+            </a:avLst>
+          </a:prstGeom>
+          <a:solidFill>
+            <a:srgbClr val="A02747"/>
+          </a:solidFill>
+          <a:ln>
+            <a:noFill/>
+          </a:ln>
+          <a:effectLst/>
+        </p:spPr>
+        <p:style>
+          <a:lnRef idx="1">
+            <a:schemeClr val="accent1"/>
+          </a:lnRef>
+          <a:fillRef idx="3">
+            <a:schemeClr val="accent1"/>
+          </a:fillRef>
+          <a:effectRef idx="2">
+            <a:schemeClr val="accent1"/>
+          </a:effectRef>
+          <a:fontRef idx="minor">
+            <a:schemeClr val="lt1"/>
+          </a:fontRef>
+        </p:style>
+        <p:txBody>
+          <a:bodyPr rtlCol="0" anchor="ctr"/>
+          <a:lstStyle/>
+          <a:p>
+            <a:pPr algn="ctr"/>
+          </a:p>
+        </p:txBody>
+      </p:sp>
+      <p:sp>
+        <p:nvSpPr>
+          <p:cNvPr id="13" name="Rounded Rectangle 12"/>
+          <p:cNvSpPr/>
+          <p:nvPr/>
+        </p:nvSpPr>
+        <p:spPr>
+          <a:xfrm>
+            <a:off x="3337560" y="3063240"/>
+            <a:ext cx="2743200" cy="3291840"/>
           </a:xfrm>
           <a:prstGeom prst="roundRect">
             <a:avLst>
@@ -16696,49 +16590,84 @@
       </p:sp>
       <p:sp>
         <p:nvSpPr>
-          <p:cNvPr id="11" name="TextBox 10"/>
-          <p:cNvSpPr txBox="1"/>
-          <p:nvPr/>
-        </p:nvSpPr>
-        <p:spPr>
-          <a:xfrm>
-            <a:off x="4572000" y="2743200"/>
-            <a:ext cx="3108960" cy="365760"/>
-          </a:xfrm>
-          <a:prstGeom prst="rect">
-            <a:avLst/>
-          </a:prstGeom>
-          <a:noFill/>
-        </p:spPr>
-        <p:txBody>
-          <a:bodyPr wrap="square" lIns="0" rIns="0" tIns="0" bIns="0" anchor="t">
-            <a:spAutoFit/>
-          </a:bodyPr>
-          <a:lstStyle/>
-          <a:p>
-            <a:pPr algn="l"/>
-            <a:r>
-              <a:rPr sz="1400" b="1">
+          <p:cNvPr id="14" name="TextBox 13"/>
+          <p:cNvSpPr txBox="1"/>
+          <p:nvPr/>
+        </p:nvSpPr>
+        <p:spPr>
+          <a:xfrm>
+            <a:off x="3611880" y="3200400"/>
+            <a:ext cx="2194560" cy="365760"/>
+          </a:xfrm>
+          <a:prstGeom prst="rect">
+            <a:avLst/>
+          </a:prstGeom>
+          <a:noFill/>
+        </p:spPr>
+        <p:txBody>
+          <a:bodyPr wrap="square" lIns="0" rIns="0" tIns="0" bIns="0" anchor="t">
+            <a:spAutoFit/>
+          </a:bodyPr>
+          <a:lstStyle/>
+          <a:p>
+            <a:pPr algn="l"/>
+            <a:r>
+              <a:rPr sz="1000" b="1">
                 <a:solidFill>
                   <a:srgbClr val="A02747"/>
                 </a:solidFill>
                 <a:latin typeface="Calibri"/>
               </a:rPr>
-              <a:t>Gift uptake</a:t>
-            </a:r>
-          </a:p>
-        </p:txBody>
-      </p:sp>
-      <p:sp>
-        <p:nvSpPr>
-          <p:cNvPr id="12" name="TextBox 11"/>
-          <p:cNvSpPr txBox="1"/>
-          <p:nvPr/>
-        </p:nvSpPr>
-        <p:spPr>
-          <a:xfrm>
-            <a:off x="4572000" y="3154680"/>
-            <a:ext cx="3108960" cy="822960"/>
+              <a:t>Weeks 3–16</a:t>
+            </a:r>
+          </a:p>
+        </p:txBody>
+      </p:sp>
+      <p:sp>
+        <p:nvSpPr>
+          <p:cNvPr id="15" name="TextBox 14"/>
+          <p:cNvSpPr txBox="1"/>
+          <p:nvPr/>
+        </p:nvSpPr>
+        <p:spPr>
+          <a:xfrm>
+            <a:off x="3611880" y="3566160"/>
+            <a:ext cx="2194560" cy="548640"/>
+          </a:xfrm>
+          <a:prstGeom prst="rect">
+            <a:avLst/>
+          </a:prstGeom>
+          <a:noFill/>
+        </p:spPr>
+        <p:txBody>
+          <a:bodyPr wrap="square" lIns="0" rIns="0" tIns="0" bIns="0" anchor="t">
+            <a:spAutoFit/>
+          </a:bodyPr>
+          <a:lstStyle/>
+          <a:p>
+            <a:pPr algn="l"/>
+            <a:r>
+              <a:rPr sz="2200" b="0">
+                <a:solidFill>
+                  <a:srgbClr val="2A1A14"/>
+                </a:solidFill>
+                <a:latin typeface="Georgia"/>
+              </a:rPr>
+              <a:t>Phase 1 build</a:t>
+            </a:r>
+          </a:p>
+        </p:txBody>
+      </p:sp>
+      <p:sp>
+        <p:nvSpPr>
+          <p:cNvPr id="16" name="TextBox 15"/>
+          <p:cNvSpPr txBox="1"/>
+          <p:nvPr/>
+        </p:nvSpPr>
+        <p:spPr>
+          <a:xfrm>
+            <a:off x="3611880" y="4389120"/>
+            <a:ext cx="2194560" cy="1828800"/>
           </a:xfrm>
           <a:prstGeom prst="rect">
             <a:avLst/>
@@ -16759,56 +16688,67 @@
                 </a:solidFill>
                 <a:latin typeface="Calibri"/>
               </a:rPr>
-              <a:t>% of orders placed through gift-mode with scheduled unboxing</a:t>
-            </a:r>
-          </a:p>
-        </p:txBody>
-      </p:sp>
-      <p:sp>
-        <p:nvSpPr>
-          <p:cNvPr id="13" name="TextBox 12"/>
-          <p:cNvSpPr txBox="1"/>
-          <p:nvPr/>
-        </p:nvSpPr>
-        <p:spPr>
-          <a:xfrm>
-            <a:off x="4572000" y="3931920"/>
-            <a:ext cx="3108960" cy="365760"/>
-          </a:xfrm>
-          <a:prstGeom prst="rect">
-            <a:avLst/>
-          </a:prstGeom>
-          <a:noFill/>
-        </p:spPr>
-        <p:txBody>
-          <a:bodyPr wrap="square" lIns="0" rIns="0" tIns="0" bIns="0" anchor="t">
-            <a:spAutoFit/>
-          </a:bodyPr>
-          <a:lstStyle/>
-          <a:p>
-            <a:pPr algn="l"/>
-            <a:r>
-              <a:rPr sz="1400" b="0">
-                <a:solidFill>
-                  <a:srgbClr val="2A1A14"/>
-                </a:solidFill>
-                <a:latin typeface="Georgia"/>
-              </a:rPr>
-              <a:t>Target ≥ 40% by month 12</a:t>
-            </a:r>
-          </a:p>
-        </p:txBody>
-      </p:sp>
-      <p:sp>
-        <p:nvSpPr>
-          <p:cNvPr id="14" name="Rounded Rectangle 13"/>
+              <a:t>Atelier, Mercado, Gift, Traveler, Archive. EN/ES at launch. Tier 1 AI. Soft launch from Polanco studio.</a:t>
+            </a:r>
+          </a:p>
+        </p:txBody>
+      </p:sp>
+      <p:sp>
+        <p:nvSpPr>
+          <p:cNvPr id="17" name="Rounded Rectangle 16"/>
           <p:cNvSpPr/>
           <p:nvPr/>
         </p:nvSpPr>
         <p:spPr>
           <a:xfrm>
-            <a:off x="8046720" y="2560320"/>
-            <a:ext cx="3657600" cy="1828800"/>
+            <a:off x="7406640" y="2651760"/>
+            <a:ext cx="182880" cy="182880"/>
+          </a:xfrm>
+          <a:prstGeom prst="roundRect">
+            <a:avLst>
+              <a:gd name="adj" fmla="val 12000"/>
+            </a:avLst>
+          </a:prstGeom>
+          <a:solidFill>
+            <a:srgbClr val="A02747"/>
+          </a:solidFill>
+          <a:ln>
+            <a:noFill/>
+          </a:ln>
+          <a:effectLst/>
+        </p:spPr>
+        <p:style>
+          <a:lnRef idx="1">
+            <a:schemeClr val="accent1"/>
+          </a:lnRef>
+          <a:fillRef idx="3">
+            <a:schemeClr val="accent1"/>
+          </a:fillRef>
+          <a:effectRef idx="2">
+            <a:schemeClr val="accent1"/>
+          </a:effectRef>
+          <a:fontRef idx="minor">
+            <a:schemeClr val="lt1"/>
+          </a:fontRef>
+        </p:style>
+        <p:txBody>
+          <a:bodyPr rtlCol="0" anchor="ctr"/>
+          <a:lstStyle/>
+          <a:p>
+            <a:pPr algn="ctr"/>
+          </a:p>
+        </p:txBody>
+      </p:sp>
+      <p:sp>
+        <p:nvSpPr>
+          <p:cNvPr id="18" name="Rounded Rectangle 17"/>
+          <p:cNvSpPr/>
+          <p:nvPr/>
+        </p:nvSpPr>
+        <p:spPr>
+          <a:xfrm>
+            <a:off x="6126480" y="3063240"/>
+            <a:ext cx="2743200" cy="3291840"/>
           </a:xfrm>
           <a:prstGeom prst="roundRect">
             <a:avLst>
@@ -16849,49 +16789,84 @@
       </p:sp>
       <p:sp>
         <p:nvSpPr>
-          <p:cNvPr id="15" name="TextBox 14"/>
-          <p:cNvSpPr txBox="1"/>
-          <p:nvPr/>
-        </p:nvSpPr>
-        <p:spPr>
-          <a:xfrm>
-            <a:off x="8321040" y="2743200"/>
-            <a:ext cx="3108960" cy="365760"/>
-          </a:xfrm>
-          <a:prstGeom prst="rect">
-            <a:avLst/>
-          </a:prstGeom>
-          <a:noFill/>
-        </p:spPr>
-        <p:txBody>
-          <a:bodyPr wrap="square" lIns="0" rIns="0" tIns="0" bIns="0" anchor="t">
-            <a:spAutoFit/>
-          </a:bodyPr>
-          <a:lstStyle/>
-          <a:p>
-            <a:pPr algn="l"/>
-            <a:r>
-              <a:rPr sz="1400" b="1">
+          <p:cNvPr id="19" name="TextBox 18"/>
+          <p:cNvSpPr txBox="1"/>
+          <p:nvPr/>
+        </p:nvSpPr>
+        <p:spPr>
+          <a:xfrm>
+            <a:off x="6400800" y="3200400"/>
+            <a:ext cx="2194560" cy="365760"/>
+          </a:xfrm>
+          <a:prstGeom prst="rect">
+            <a:avLst/>
+          </a:prstGeom>
+          <a:noFill/>
+        </p:spPr>
+        <p:txBody>
+          <a:bodyPr wrap="square" lIns="0" rIns="0" tIns="0" bIns="0" anchor="t">
+            <a:spAutoFit/>
+          </a:bodyPr>
+          <a:lstStyle/>
+          <a:p>
+            <a:pPr algn="l"/>
+            <a:r>
+              <a:rPr sz="1000" b="1">
                 <a:solidFill>
                   <a:srgbClr val="A02747"/>
                 </a:solidFill>
                 <a:latin typeface="Calibri"/>
               </a:rPr>
-              <a:t>Recipient activation</a:t>
-            </a:r>
-          </a:p>
-        </p:txBody>
-      </p:sp>
-      <p:sp>
-        <p:nvSpPr>
-          <p:cNvPr id="16" name="TextBox 15"/>
-          <p:cNvSpPr txBox="1"/>
-          <p:nvPr/>
-        </p:nvSpPr>
-        <p:spPr>
-          <a:xfrm>
-            <a:off x="8321040" y="3154680"/>
-            <a:ext cx="3108960" cy="822960"/>
+              <a:t>Weeks 17–32</a:t>
+            </a:r>
+          </a:p>
+        </p:txBody>
+      </p:sp>
+      <p:sp>
+        <p:nvSpPr>
+          <p:cNvPr id="20" name="TextBox 19"/>
+          <p:cNvSpPr txBox="1"/>
+          <p:nvPr/>
+        </p:nvSpPr>
+        <p:spPr>
+          <a:xfrm>
+            <a:off x="6400800" y="3566160"/>
+            <a:ext cx="2194560" cy="548640"/>
+          </a:xfrm>
+          <a:prstGeom prst="rect">
+            <a:avLst/>
+          </a:prstGeom>
+          <a:noFill/>
+        </p:spPr>
+        <p:txBody>
+          <a:bodyPr wrap="square" lIns="0" rIns="0" tIns="0" bIns="0" anchor="t">
+            <a:spAutoFit/>
+          </a:bodyPr>
+          <a:lstStyle/>
+          <a:p>
+            <a:pPr algn="l"/>
+            <a:r>
+              <a:rPr sz="2200" b="0">
+                <a:solidFill>
+                  <a:srgbClr val="2A1A14"/>
+                </a:solidFill>
+                <a:latin typeface="Georgia"/>
+              </a:rPr>
+              <a:t>Phase 2 build</a:t>
+            </a:r>
+          </a:p>
+        </p:txBody>
+      </p:sp>
+      <p:sp>
+        <p:nvSpPr>
+          <p:cNvPr id="21" name="TextBox 20"/>
+          <p:cNvSpPr txBox="1"/>
+          <p:nvPr/>
+        </p:nvSpPr>
+        <p:spPr>
+          <a:xfrm>
+            <a:off x="6400800" y="4389120"/>
+            <a:ext cx="2194560" cy="1828800"/>
           </a:xfrm>
           <a:prstGeom prst="rect">
             <a:avLst/>
@@ -16912,56 +16887,67 @@
                 </a:solidFill>
                 <a:latin typeface="Calibri"/>
               </a:rPr>
-              <a:t>% of gift recipients who install the app and open the Atelier story</a:t>
-            </a:r>
-          </a:p>
-        </p:txBody>
-      </p:sp>
-      <p:sp>
-        <p:nvSpPr>
-          <p:cNvPr id="17" name="TextBox 16"/>
-          <p:cNvSpPr txBox="1"/>
-          <p:nvPr/>
-        </p:nvSpPr>
-        <p:spPr>
-          <a:xfrm>
-            <a:off x="8321040" y="3931920"/>
-            <a:ext cx="3108960" cy="365760"/>
-          </a:xfrm>
-          <a:prstGeom prst="rect">
-            <a:avLst/>
-          </a:prstGeom>
-          <a:noFill/>
-        </p:spPr>
-        <p:txBody>
-          <a:bodyPr wrap="square" lIns="0" rIns="0" tIns="0" bIns="0" anchor="t">
-            <a:spAutoFit/>
-          </a:bodyPr>
-          <a:lstStyle/>
-          <a:p>
-            <a:pPr algn="l"/>
-            <a:r>
-              <a:rPr sz="1400" b="0">
-                <a:solidFill>
-                  <a:srgbClr val="2A1A14"/>
-                </a:solidFill>
-                <a:latin typeface="Georgia"/>
-              </a:rPr>
-              <a:t>Target ≥ 55%</a:t>
-            </a:r>
-          </a:p>
-        </p:txBody>
-      </p:sp>
-      <p:sp>
-        <p:nvSpPr>
-          <p:cNvPr id="18" name="Rounded Rectangle 17"/>
+              <a:t>AR try-on, photo authenticity, corporate gifting portal, gift-narration video. Add FR/JP/ZH languages.</a:t>
+            </a:r>
+          </a:p>
+        </p:txBody>
+      </p:sp>
+      <p:sp>
+        <p:nvSpPr>
+          <p:cNvPr id="22" name="Rounded Rectangle 21"/>
           <p:cNvSpPr/>
           <p:nvPr/>
         </p:nvSpPr>
         <p:spPr>
           <a:xfrm>
-            <a:off x="548640" y="4480560"/>
-            <a:ext cx="3657600" cy="1828800"/>
+            <a:off x="10195560" y="2651760"/>
+            <a:ext cx="182880" cy="182880"/>
+          </a:xfrm>
+          <a:prstGeom prst="roundRect">
+            <a:avLst>
+              <a:gd name="adj" fmla="val 12000"/>
+            </a:avLst>
+          </a:prstGeom>
+          <a:solidFill>
+            <a:srgbClr val="A02747"/>
+          </a:solidFill>
+          <a:ln>
+            <a:noFill/>
+          </a:ln>
+          <a:effectLst/>
+        </p:spPr>
+        <p:style>
+          <a:lnRef idx="1">
+            <a:schemeClr val="accent1"/>
+          </a:lnRef>
+          <a:fillRef idx="3">
+            <a:schemeClr val="accent1"/>
+          </a:fillRef>
+          <a:effectRef idx="2">
+            <a:schemeClr val="accent1"/>
+          </a:effectRef>
+          <a:fontRef idx="minor">
+            <a:schemeClr val="lt1"/>
+          </a:fontRef>
+        </p:style>
+        <p:txBody>
+          <a:bodyPr rtlCol="0" anchor="ctr"/>
+          <a:lstStyle/>
+          <a:p>
+            <a:pPr algn="ctr"/>
+          </a:p>
+        </p:txBody>
+      </p:sp>
+      <p:sp>
+        <p:nvSpPr>
+          <p:cNvPr id="23" name="Rounded Rectangle 22"/>
+          <p:cNvSpPr/>
+          <p:nvPr/>
+        </p:nvSpPr>
+        <p:spPr>
+          <a:xfrm>
+            <a:off x="8915400" y="3063240"/>
+            <a:ext cx="2743200" cy="3291840"/>
           </a:xfrm>
           <a:prstGeom prst="roundRect">
             <a:avLst>
@@ -17002,49 +16988,84 @@
       </p:sp>
       <p:sp>
         <p:nvSpPr>
-          <p:cNvPr id="19" name="TextBox 18"/>
-          <p:cNvSpPr txBox="1"/>
-          <p:nvPr/>
-        </p:nvSpPr>
-        <p:spPr>
-          <a:xfrm>
-            <a:off x="822960" y="4663440"/>
-            <a:ext cx="3108960" cy="365760"/>
-          </a:xfrm>
-          <a:prstGeom prst="rect">
-            <a:avLst/>
-          </a:prstGeom>
-          <a:noFill/>
-        </p:spPr>
-        <p:txBody>
-          <a:bodyPr wrap="square" lIns="0" rIns="0" tIns="0" bIns="0" anchor="t">
-            <a:spAutoFit/>
-          </a:bodyPr>
-          <a:lstStyle/>
-          <a:p>
-            <a:pPr algn="l"/>
-            <a:r>
-              <a:rPr sz="1400" b="1">
+          <p:cNvPr id="24" name="TextBox 23"/>
+          <p:cNvSpPr txBox="1"/>
+          <p:nvPr/>
+        </p:nvSpPr>
+        <p:spPr>
+          <a:xfrm>
+            <a:off x="9189720" y="3200400"/>
+            <a:ext cx="2194560" cy="365760"/>
+          </a:xfrm>
+          <a:prstGeom prst="rect">
+            <a:avLst/>
+          </a:prstGeom>
+          <a:noFill/>
+        </p:spPr>
+        <p:txBody>
+          <a:bodyPr wrap="square" lIns="0" rIns="0" tIns="0" bIns="0" anchor="t">
+            <a:spAutoFit/>
+          </a:bodyPr>
+          <a:lstStyle/>
+          <a:p>
+            <a:pPr algn="l"/>
+            <a:r>
+              <a:rPr sz="1000" b="1">
                 <a:solidFill>
                   <a:srgbClr val="A02747"/>
                 </a:solidFill>
                 <a:latin typeface="Calibri"/>
               </a:rPr>
-              <a:t>Collector depth</a:t>
-            </a:r>
-          </a:p>
-        </p:txBody>
-      </p:sp>
-      <p:sp>
-        <p:nvSpPr>
-          <p:cNvPr id="20" name="TextBox 19"/>
-          <p:cNvSpPr txBox="1"/>
-          <p:nvPr/>
-        </p:nvSpPr>
-        <p:spPr>
-          <a:xfrm>
-            <a:off x="822960" y="5074920"/>
-            <a:ext cx="3108960" cy="822960"/>
+              <a:t>Weeks 33–40+</a:t>
+            </a:r>
+          </a:p>
+        </p:txBody>
+      </p:sp>
+      <p:sp>
+        <p:nvSpPr>
+          <p:cNvPr id="25" name="TextBox 24"/>
+          <p:cNvSpPr txBox="1"/>
+          <p:nvPr/>
+        </p:nvSpPr>
+        <p:spPr>
+          <a:xfrm>
+            <a:off x="9189720" y="3566160"/>
+            <a:ext cx="2194560" cy="548640"/>
+          </a:xfrm>
+          <a:prstGeom prst="rect">
+            <a:avLst/>
+          </a:prstGeom>
+          <a:noFill/>
+        </p:spPr>
+        <p:txBody>
+          <a:bodyPr wrap="square" lIns="0" rIns="0" tIns="0" bIns="0" anchor="t">
+            <a:spAutoFit/>
+          </a:bodyPr>
+          <a:lstStyle/>
+          <a:p>
+            <a:pPr algn="l"/>
+            <a:r>
+              <a:rPr sz="2200" b="0">
+                <a:solidFill>
+                  <a:srgbClr val="2A1A14"/>
+                </a:solidFill>
+                <a:latin typeface="Georgia"/>
+              </a:rPr>
+              <a:t>Phase 3 build</a:t>
+            </a:r>
+          </a:p>
+        </p:txBody>
+      </p:sp>
+      <p:sp>
+        <p:nvSpPr>
+          <p:cNvPr id="26" name="TextBox 25"/>
+          <p:cNvSpPr txBox="1"/>
+          <p:nvPr/>
+        </p:nvSpPr>
+        <p:spPr>
+          <a:xfrm>
+            <a:off x="9189720" y="4389120"/>
+            <a:ext cx="2194560" cy="1828800"/>
           </a:xfrm>
           <a:prstGeom prst="rect">
             <a:avLst/>
@@ -17065,355 +17086,14 @@
                 </a:solidFill>
                 <a:latin typeface="Calibri"/>
               </a:rPr>
-              <a:t>Average pieces registered per active user</a:t>
-            </a:r>
-          </a:p>
-        </p:txBody>
-      </p:sp>
-      <p:sp>
-        <p:nvSpPr>
-          <p:cNvPr id="21" name="TextBox 20"/>
-          <p:cNvSpPr txBox="1"/>
-          <p:nvPr/>
-        </p:nvSpPr>
-        <p:spPr>
-          <a:xfrm>
-            <a:off x="822960" y="5852160"/>
-            <a:ext cx="3108960" cy="365760"/>
-          </a:xfrm>
-          <a:prstGeom prst="rect">
-            <a:avLst/>
-          </a:prstGeom>
-          <a:noFill/>
-        </p:spPr>
-        <p:txBody>
-          <a:bodyPr wrap="square" lIns="0" rIns="0" tIns="0" bIns="0" anchor="t">
-            <a:spAutoFit/>
-          </a:bodyPr>
-          <a:lstStyle/>
-          <a:p>
-            <a:pPr algn="l"/>
-            <a:r>
-              <a:rPr sz="1400" b="0">
-                <a:solidFill>
-                  <a:srgbClr val="2A1A14"/>
-                </a:solidFill>
-                <a:latin typeface="Georgia"/>
-              </a:rPr>
-              <a:t>Target ≥ 3 by month 9</a:t>
-            </a:r>
-          </a:p>
-        </p:txBody>
-      </p:sp>
-      <p:sp>
-        <p:nvSpPr>
-          <p:cNvPr id="22" name="Rounded Rectangle 21"/>
-          <p:cNvSpPr/>
-          <p:nvPr/>
-        </p:nvSpPr>
-        <p:spPr>
-          <a:xfrm>
-            <a:off x="4297680" y="4480560"/>
-            <a:ext cx="3657600" cy="1828800"/>
-          </a:xfrm>
-          <a:prstGeom prst="roundRect">
-            <a:avLst>
-              <a:gd name="adj" fmla="val 12000"/>
-            </a:avLst>
-          </a:prstGeom>
-          <a:solidFill>
-            <a:srgbClr val="FFFFFF"/>
-          </a:solidFill>
-          <a:ln w="9525">
-            <a:solidFill>
-              <a:srgbClr val="E6D9C0"/>
-            </a:solidFill>
-          </a:ln>
-          <a:effectLst/>
-        </p:spPr>
-        <p:style>
-          <a:lnRef idx="1">
-            <a:schemeClr val="accent1"/>
-          </a:lnRef>
-          <a:fillRef idx="3">
-            <a:schemeClr val="accent1"/>
-          </a:fillRef>
-          <a:effectRef idx="2">
-            <a:schemeClr val="accent1"/>
-          </a:effectRef>
-          <a:fontRef idx="minor">
-            <a:schemeClr val="lt1"/>
-          </a:fontRef>
-        </p:style>
-        <p:txBody>
-          <a:bodyPr rtlCol="0" anchor="ctr"/>
-          <a:lstStyle/>
-          <a:p>
-            <a:pPr algn="ctr"/>
-          </a:p>
-        </p:txBody>
-      </p:sp>
-      <p:sp>
-        <p:nvSpPr>
-          <p:cNvPr id="23" name="TextBox 22"/>
-          <p:cNvSpPr txBox="1"/>
-          <p:nvPr/>
-        </p:nvSpPr>
-        <p:spPr>
-          <a:xfrm>
-            <a:off x="4572000" y="4663440"/>
-            <a:ext cx="3108960" cy="365760"/>
-          </a:xfrm>
-          <a:prstGeom prst="rect">
-            <a:avLst/>
-          </a:prstGeom>
-          <a:noFill/>
-        </p:spPr>
-        <p:txBody>
-          <a:bodyPr wrap="square" lIns="0" rIns="0" tIns="0" bIns="0" anchor="t">
-            <a:spAutoFit/>
-          </a:bodyPr>
-          <a:lstStyle/>
-          <a:p>
-            <a:pPr algn="l"/>
-            <a:r>
-              <a:rPr sz="1400" b="1">
-                <a:solidFill>
-                  <a:srgbClr val="A02747"/>
-                </a:solidFill>
-                <a:latin typeface="Calibri"/>
-              </a:rPr>
-              <a:t>Cross-language reach</a:t>
-            </a:r>
-          </a:p>
-        </p:txBody>
-      </p:sp>
-      <p:sp>
-        <p:nvSpPr>
-          <p:cNvPr id="24" name="TextBox 23"/>
-          <p:cNvSpPr txBox="1"/>
-          <p:nvPr/>
-        </p:nvSpPr>
-        <p:spPr>
-          <a:xfrm>
-            <a:off x="4572000" y="5074920"/>
-            <a:ext cx="3108960" cy="822960"/>
-          </a:xfrm>
-          <a:prstGeom prst="rect">
-            <a:avLst/>
-          </a:prstGeom>
-          <a:noFill/>
-        </p:spPr>
-        <p:txBody>
-          <a:bodyPr wrap="square" lIns="0" rIns="0" tIns="0" bIns="0" anchor="t">
-            <a:spAutoFit/>
-          </a:bodyPr>
-          <a:lstStyle/>
-          <a:p>
-            <a:pPr algn="l"/>
-            <a:r>
-              <a:rPr sz="1100" b="0">
-                <a:solidFill>
-                  <a:srgbClr val="8A7866"/>
-                </a:solidFill>
-                <a:latin typeface="Calibri"/>
-              </a:rPr>
-              <a:t>% of sessions in EN, FR, JP, ZH (non-ES)</a:t>
-            </a:r>
-          </a:p>
-        </p:txBody>
-      </p:sp>
-      <p:sp>
-        <p:nvSpPr>
-          <p:cNvPr id="25" name="TextBox 24"/>
-          <p:cNvSpPr txBox="1"/>
-          <p:nvPr/>
-        </p:nvSpPr>
-        <p:spPr>
-          <a:xfrm>
-            <a:off x="4572000" y="5852160"/>
-            <a:ext cx="3108960" cy="365760"/>
-          </a:xfrm>
-          <a:prstGeom prst="rect">
-            <a:avLst/>
-          </a:prstGeom>
-          <a:noFill/>
-        </p:spPr>
-        <p:txBody>
-          <a:bodyPr wrap="square" lIns="0" rIns="0" tIns="0" bIns="0" anchor="t">
-            <a:spAutoFit/>
-          </a:bodyPr>
-          <a:lstStyle/>
-          <a:p>
-            <a:pPr algn="l"/>
-            <a:r>
-              <a:rPr sz="1400" b="0">
-                <a:solidFill>
-                  <a:srgbClr val="2A1A14"/>
-                </a:solidFill>
-                <a:latin typeface="Georgia"/>
-              </a:rPr>
-              <a:t>Target ≥ 50% by month 12</a:t>
-            </a:r>
-          </a:p>
-        </p:txBody>
-      </p:sp>
-      <p:sp>
-        <p:nvSpPr>
-          <p:cNvPr id="26" name="Rounded Rectangle 25"/>
-          <p:cNvSpPr/>
-          <p:nvPr/>
-        </p:nvSpPr>
-        <p:spPr>
-          <a:xfrm>
-            <a:off x="8046720" y="4480560"/>
-            <a:ext cx="3657600" cy="1828800"/>
-          </a:xfrm>
-          <a:prstGeom prst="roundRect">
-            <a:avLst>
-              <a:gd name="adj" fmla="val 12000"/>
-            </a:avLst>
-          </a:prstGeom>
-          <a:solidFill>
-            <a:srgbClr val="FFFFFF"/>
-          </a:solidFill>
-          <a:ln w="9525">
-            <a:solidFill>
-              <a:srgbClr val="E6D9C0"/>
-            </a:solidFill>
-          </a:ln>
-          <a:effectLst/>
-        </p:spPr>
-        <p:style>
-          <a:lnRef idx="1">
-            <a:schemeClr val="accent1"/>
-          </a:lnRef>
-          <a:fillRef idx="3">
-            <a:schemeClr val="accent1"/>
-          </a:fillRef>
-          <a:effectRef idx="2">
-            <a:schemeClr val="accent1"/>
-          </a:effectRef>
-          <a:fontRef idx="minor">
-            <a:schemeClr val="lt1"/>
-          </a:fontRef>
-        </p:style>
-        <p:txBody>
-          <a:bodyPr rtlCol="0" anchor="ctr"/>
-          <a:lstStyle/>
-          <a:p>
-            <a:pPr algn="ctr"/>
+              <a:t>Editorial engine, atelier livestreams, AI bespoke concept, demand sensing.</a:t>
+            </a:r>
           </a:p>
         </p:txBody>
       </p:sp>
       <p:sp>
         <p:nvSpPr>
           <p:cNvPr id="27" name="TextBox 26"/>
-          <p:cNvSpPr txBox="1"/>
-          <p:nvPr/>
-        </p:nvSpPr>
-        <p:spPr>
-          <a:xfrm>
-            <a:off x="8321040" y="4663440"/>
-            <a:ext cx="3108960" cy="365760"/>
-          </a:xfrm>
-          <a:prstGeom prst="rect">
-            <a:avLst/>
-          </a:prstGeom>
-          <a:noFill/>
-        </p:spPr>
-        <p:txBody>
-          <a:bodyPr wrap="square" lIns="0" rIns="0" tIns="0" bIns="0" anchor="t">
-            <a:spAutoFit/>
-          </a:bodyPr>
-          <a:lstStyle/>
-          <a:p>
-            <a:pPr algn="l"/>
-            <a:r>
-              <a:rPr sz="1400" b="1">
-                <a:solidFill>
-                  <a:srgbClr val="A02747"/>
-                </a:solidFill>
-                <a:latin typeface="Calibri"/>
-              </a:rPr>
-              <a:t>Authenticity confidence</a:t>
-            </a:r>
-          </a:p>
-        </p:txBody>
-      </p:sp>
-      <p:sp>
-        <p:nvSpPr>
-          <p:cNvPr id="28" name="TextBox 27"/>
-          <p:cNvSpPr txBox="1"/>
-          <p:nvPr/>
-        </p:nvSpPr>
-        <p:spPr>
-          <a:xfrm>
-            <a:off x="8321040" y="5074920"/>
-            <a:ext cx="3108960" cy="822960"/>
-          </a:xfrm>
-          <a:prstGeom prst="rect">
-            <a:avLst/>
-          </a:prstGeom>
-          <a:noFill/>
-        </p:spPr>
-        <p:txBody>
-          <a:bodyPr wrap="square" lIns="0" rIns="0" tIns="0" bIns="0" anchor="t">
-            <a:spAutoFit/>
-          </a:bodyPr>
-          <a:lstStyle/>
-          <a:p>
-            <a:pPr algn="l"/>
-            <a:r>
-              <a:rPr sz="1100" b="0">
-                <a:solidFill>
-                  <a:srgbClr val="8A7866"/>
-                </a:solidFill>
-                <a:latin typeface="Calibri"/>
-              </a:rPr>
-              <a:t>% of pieces verified through the in-app authenticity flow</a:t>
-            </a:r>
-          </a:p>
-        </p:txBody>
-      </p:sp>
-      <p:sp>
-        <p:nvSpPr>
-          <p:cNvPr id="29" name="TextBox 28"/>
-          <p:cNvSpPr txBox="1"/>
-          <p:nvPr/>
-        </p:nvSpPr>
-        <p:spPr>
-          <a:xfrm>
-            <a:off x="8321040" y="5852160"/>
-            <a:ext cx="3108960" cy="365760"/>
-          </a:xfrm>
-          <a:prstGeom prst="rect">
-            <a:avLst/>
-          </a:prstGeom>
-          <a:noFill/>
-        </p:spPr>
-        <p:txBody>
-          <a:bodyPr wrap="square" lIns="0" rIns="0" tIns="0" bIns="0" anchor="t">
-            <a:spAutoFit/>
-          </a:bodyPr>
-          <a:lstStyle/>
-          <a:p>
-            <a:pPr algn="l"/>
-            <a:r>
-              <a:rPr sz="1400" b="0">
-                <a:solidFill>
-                  <a:srgbClr val="2A1A14"/>
-                </a:solidFill>
-                <a:latin typeface="Georgia"/>
-              </a:rPr>
-              <a:t>Target ≥ 70% of new sales</a:t>
-            </a:r>
-          </a:p>
-        </p:txBody>
-      </p:sp>
-      <p:sp>
-        <p:nvSpPr>
-          <p:cNvPr id="30" name="TextBox 29"/>
           <p:cNvSpPr txBox="1"/>
           <p:nvPr/>
         </p:nvSpPr>
@@ -17448,7 +17128,7 @@
       </p:sp>
       <p:sp>
         <p:nvSpPr>
-          <p:cNvPr id="31" name="TextBox 30"/>
+          <p:cNvPr id="28" name="TextBox 27"/>
           <p:cNvSpPr txBox="1"/>
           <p:nvPr/>
         </p:nvSpPr>
@@ -17476,7 +17156,7 @@
                 </a:solidFill>
                 <a:latin typeface="Calibri"/>
               </a:rPr>
-              <a:t>18 / 22</a:t>
+              <a:t>18 / 23</a:t>
             </a:r>
           </a:p>
         </p:txBody>
@@ -17573,7 +17253,7 @@
                 </a:solidFill>
                 <a:latin typeface="Calibri"/>
               </a:rPr>
-              <a:t>HOW IT WILL FEEL</a:t>
+              <a:t>HOW WE'LL KNOW IT'S WORKING</a:t>
             </a:r>
           </a:p>
         </p:txBody>
@@ -17608,7 +17288,7 @@
                 </a:solidFill>
                 <a:latin typeface="Georgia"/>
               </a:rPr>
-              <a:t>Design principles.</a:t>
+              <a:t>The metrics that matter.</a:t>
             </a:r>
           </a:p>
         </p:txBody>
@@ -17664,8 +17344,8 @@
         </p:nvSpPr>
         <p:spPr>
           <a:xfrm>
-            <a:off x="548640" y="2468880"/>
-            <a:ext cx="5486400" cy="1280160"/>
+            <a:off x="548640" y="2560320"/>
+            <a:ext cx="3657600" cy="1828800"/>
           </a:xfrm>
           <a:prstGeom prst="roundRect">
             <a:avLst>
@@ -17712,8 +17392,8 @@
         </p:nvSpPr>
         <p:spPr>
           <a:xfrm>
-            <a:off x="822960" y="2651760"/>
-            <a:ext cx="4937760" cy="365760"/>
+            <a:off x="822960" y="2743200"/>
+            <a:ext cx="3108960" cy="365760"/>
           </a:xfrm>
           <a:prstGeom prst="rect">
             <a:avLst/>
@@ -17734,7 +17414,7 @@
                 </a:solidFill>
                 <a:latin typeface="Calibri"/>
               </a:rPr>
-              <a:t>Calm, never kitsch</a:t>
+              <a:t>Tourist retention</a:t>
             </a:r>
           </a:p>
         </p:txBody>
@@ -17747,8 +17427,8 @@
         </p:nvSpPr>
         <p:spPr>
           <a:xfrm>
-            <a:off x="822960" y="3063240"/>
-            <a:ext cx="4937760" cy="914400"/>
+            <a:off x="822960" y="3154680"/>
+            <a:ext cx="3108960" cy="822960"/>
           </a:xfrm>
           <a:prstGeom prst="rect">
             <a:avLst/>
@@ -17769,21 +17449,56 @@
                 </a:solidFill>
                 <a:latin typeface="Calibri"/>
               </a:rPr>
-              <a:t>The motifs are bold; the interface is restrained. The silk does the talking.</a:t>
-            </a:r>
-          </a:p>
-        </p:txBody>
-      </p:sp>
-      <p:sp>
-        <p:nvSpPr>
-          <p:cNvPr id="9" name="Rounded Rectangle 8"/>
+              <a:t>% of airport / museum buyers who install the app and register their piece within 90 days</a:t>
+            </a:r>
+          </a:p>
+        </p:txBody>
+      </p:sp>
+      <p:sp>
+        <p:nvSpPr>
+          <p:cNvPr id="9" name="TextBox 8"/>
+          <p:cNvSpPr txBox="1"/>
+          <p:nvPr/>
+        </p:nvSpPr>
+        <p:spPr>
+          <a:xfrm>
+            <a:off x="822960" y="3931920"/>
+            <a:ext cx="3108960" cy="365760"/>
+          </a:xfrm>
+          <a:prstGeom prst="rect">
+            <a:avLst/>
+          </a:prstGeom>
+          <a:noFill/>
+        </p:spPr>
+        <p:txBody>
+          <a:bodyPr wrap="square" lIns="0" rIns="0" tIns="0" bIns="0" anchor="t">
+            <a:spAutoFit/>
+          </a:bodyPr>
+          <a:lstStyle/>
+          <a:p>
+            <a:pPr algn="l"/>
+            <a:r>
+              <a:rPr sz="1400" b="0">
+                <a:solidFill>
+                  <a:srgbClr val="2A1A14"/>
+                </a:solidFill>
+                <a:latin typeface="Georgia"/>
+              </a:rPr>
+              <a:t>Target ≥ 35% by month 9</a:t>
+            </a:r>
+          </a:p>
+        </p:txBody>
+      </p:sp>
+      <p:sp>
+        <p:nvSpPr>
+          <p:cNvPr id="10" name="Rounded Rectangle 9"/>
           <p:cNvSpPr/>
           <p:nvPr/>
         </p:nvSpPr>
         <p:spPr>
           <a:xfrm>
-            <a:off x="6172200" y="2468880"/>
-            <a:ext cx="5486400" cy="1280160"/>
+            <a:off x="4297680" y="2560320"/>
+            <a:ext cx="3657600" cy="1828800"/>
           </a:xfrm>
           <a:prstGeom prst="roundRect">
             <a:avLst>
@@ -17824,14 +17539,14 @@
       </p:sp>
       <p:sp>
         <p:nvSpPr>
-          <p:cNvPr id="10" name="TextBox 9"/>
-          <p:cNvSpPr txBox="1"/>
-          <p:nvPr/>
-        </p:nvSpPr>
-        <p:spPr>
-          <a:xfrm>
-            <a:off x="6446520" y="2651760"/>
-            <a:ext cx="4937760" cy="365760"/>
+          <p:cNvPr id="11" name="TextBox 10"/>
+          <p:cNvSpPr txBox="1"/>
+          <p:nvPr/>
+        </p:nvSpPr>
+        <p:spPr>
+          <a:xfrm>
+            <a:off x="4572000" y="2743200"/>
+            <a:ext cx="3108960" cy="365760"/>
           </a:xfrm>
           <a:prstGeom prst="rect">
             <a:avLst/>
@@ -17852,21 +17567,21 @@
                 </a:solidFill>
                 <a:latin typeface="Calibri"/>
               </a:rPr>
-              <a:t>Language is welcome</a:t>
-            </a:r>
-          </a:p>
-        </p:txBody>
-      </p:sp>
-      <p:sp>
-        <p:nvSpPr>
-          <p:cNvPr id="11" name="TextBox 10"/>
-          <p:cNvSpPr txBox="1"/>
-          <p:nvPr/>
-        </p:nvSpPr>
-        <p:spPr>
-          <a:xfrm>
-            <a:off x="6446520" y="3063240"/>
-            <a:ext cx="4937760" cy="914400"/>
+              <a:t>Gift uptake</a:t>
+            </a:r>
+          </a:p>
+        </p:txBody>
+      </p:sp>
+      <p:sp>
+        <p:nvSpPr>
+          <p:cNvPr id="12" name="TextBox 11"/>
+          <p:cNvSpPr txBox="1"/>
+          <p:nvPr/>
+        </p:nvSpPr>
+        <p:spPr>
+          <a:xfrm>
+            <a:off x="4572000" y="3154680"/>
+            <a:ext cx="3108960" cy="822960"/>
           </a:xfrm>
           <a:prstGeom prst="rect">
             <a:avLst/>
@@ -17887,21 +17602,56 @@
                 </a:solidFill>
                 <a:latin typeface="Calibri"/>
               </a:rPr>
-              <a:t>Every customer's first language matters. Translation is cultural, not literal.</a:t>
-            </a:r>
-          </a:p>
-        </p:txBody>
-      </p:sp>
-      <p:sp>
-        <p:nvSpPr>
-          <p:cNvPr id="12" name="Rounded Rectangle 11"/>
+              <a:t>% of orders placed through gift-mode with scheduled unboxing</a:t>
+            </a:r>
+          </a:p>
+        </p:txBody>
+      </p:sp>
+      <p:sp>
+        <p:nvSpPr>
+          <p:cNvPr id="13" name="TextBox 12"/>
+          <p:cNvSpPr txBox="1"/>
+          <p:nvPr/>
+        </p:nvSpPr>
+        <p:spPr>
+          <a:xfrm>
+            <a:off x="4572000" y="3931920"/>
+            <a:ext cx="3108960" cy="365760"/>
+          </a:xfrm>
+          <a:prstGeom prst="rect">
+            <a:avLst/>
+          </a:prstGeom>
+          <a:noFill/>
+        </p:spPr>
+        <p:txBody>
+          <a:bodyPr wrap="square" lIns="0" rIns="0" tIns="0" bIns="0" anchor="t">
+            <a:spAutoFit/>
+          </a:bodyPr>
+          <a:lstStyle/>
+          <a:p>
+            <a:pPr algn="l"/>
+            <a:r>
+              <a:rPr sz="1400" b="0">
+                <a:solidFill>
+                  <a:srgbClr val="2A1A14"/>
+                </a:solidFill>
+                <a:latin typeface="Georgia"/>
+              </a:rPr>
+              <a:t>Target ≥ 40% by month 12</a:t>
+            </a:r>
+          </a:p>
+        </p:txBody>
+      </p:sp>
+      <p:sp>
+        <p:nvSpPr>
+          <p:cNvPr id="14" name="Rounded Rectangle 13"/>
           <p:cNvSpPr/>
           <p:nvPr/>
         </p:nvSpPr>
         <p:spPr>
           <a:xfrm>
-            <a:off x="548640" y="3886200"/>
-            <a:ext cx="5486400" cy="1280160"/>
+            <a:off x="8046720" y="2560320"/>
+            <a:ext cx="3657600" cy="1828800"/>
           </a:xfrm>
           <a:prstGeom prst="roundRect">
             <a:avLst>
@@ -17942,14 +17692,14 @@
       </p:sp>
       <p:sp>
         <p:nvSpPr>
-          <p:cNvPr id="13" name="TextBox 12"/>
-          <p:cNvSpPr txBox="1"/>
-          <p:nvPr/>
-        </p:nvSpPr>
-        <p:spPr>
-          <a:xfrm>
-            <a:off x="822960" y="4069080"/>
-            <a:ext cx="4937760" cy="365760"/>
+          <p:cNvPr id="15" name="TextBox 14"/>
+          <p:cNvSpPr txBox="1"/>
+          <p:nvPr/>
+        </p:nvSpPr>
+        <p:spPr>
+          <a:xfrm>
+            <a:off x="8321040" y="2743200"/>
+            <a:ext cx="3108960" cy="365760"/>
           </a:xfrm>
           <a:prstGeom prst="rect">
             <a:avLst/>
@@ -17970,21 +17720,21 @@
                 </a:solidFill>
                 <a:latin typeface="Calibri"/>
               </a:rPr>
-              <a:t>Authenticity above all</a:t>
-            </a:r>
-          </a:p>
-        </p:txBody>
-      </p:sp>
-      <p:sp>
-        <p:nvSpPr>
-          <p:cNvPr id="14" name="TextBox 13"/>
-          <p:cNvSpPr txBox="1"/>
-          <p:nvPr/>
-        </p:nvSpPr>
-        <p:spPr>
-          <a:xfrm>
-            <a:off x="822960" y="4480560"/>
-            <a:ext cx="4937760" cy="914400"/>
+              <a:t>Recipient activation</a:t>
+            </a:r>
+          </a:p>
+        </p:txBody>
+      </p:sp>
+      <p:sp>
+        <p:nvSpPr>
+          <p:cNvPr id="16" name="TextBox 15"/>
+          <p:cNvSpPr txBox="1"/>
+          <p:nvPr/>
+        </p:nvSpPr>
+        <p:spPr>
+          <a:xfrm>
+            <a:off x="8321040" y="3154680"/>
+            <a:ext cx="3108960" cy="822960"/>
           </a:xfrm>
           <a:prstGeom prst="rect">
             <a:avLst/>
@@ -18005,21 +17755,56 @@
                 </a:solidFill>
                 <a:latin typeface="Calibri"/>
               </a:rPr>
-              <a:t>AI never generates final designs or motifs. The cultural craft is the brand. Guard it.</a:t>
-            </a:r>
-          </a:p>
-        </p:txBody>
-      </p:sp>
-      <p:sp>
-        <p:nvSpPr>
-          <p:cNvPr id="15" name="Rounded Rectangle 14"/>
+              <a:t>% of gift recipients who install the app and open the Atelier story</a:t>
+            </a:r>
+          </a:p>
+        </p:txBody>
+      </p:sp>
+      <p:sp>
+        <p:nvSpPr>
+          <p:cNvPr id="17" name="TextBox 16"/>
+          <p:cNvSpPr txBox="1"/>
+          <p:nvPr/>
+        </p:nvSpPr>
+        <p:spPr>
+          <a:xfrm>
+            <a:off x="8321040" y="3931920"/>
+            <a:ext cx="3108960" cy="365760"/>
+          </a:xfrm>
+          <a:prstGeom prst="rect">
+            <a:avLst/>
+          </a:prstGeom>
+          <a:noFill/>
+        </p:spPr>
+        <p:txBody>
+          <a:bodyPr wrap="square" lIns="0" rIns="0" tIns="0" bIns="0" anchor="t">
+            <a:spAutoFit/>
+          </a:bodyPr>
+          <a:lstStyle/>
+          <a:p>
+            <a:pPr algn="l"/>
+            <a:r>
+              <a:rPr sz="1400" b="0">
+                <a:solidFill>
+                  <a:srgbClr val="2A1A14"/>
+                </a:solidFill>
+                <a:latin typeface="Georgia"/>
+              </a:rPr>
+              <a:t>Target ≥ 55%</a:t>
+            </a:r>
+          </a:p>
+        </p:txBody>
+      </p:sp>
+      <p:sp>
+        <p:nvSpPr>
+          <p:cNvPr id="18" name="Rounded Rectangle 17"/>
           <p:cNvSpPr/>
           <p:nvPr/>
         </p:nvSpPr>
         <p:spPr>
           <a:xfrm>
-            <a:off x="6172200" y="3886200"/>
-            <a:ext cx="5486400" cy="1280160"/>
+            <a:off x="548640" y="4480560"/>
+            <a:ext cx="3657600" cy="1828800"/>
           </a:xfrm>
           <a:prstGeom prst="roundRect">
             <a:avLst>
@@ -18060,14 +17845,14 @@
       </p:sp>
       <p:sp>
         <p:nvSpPr>
-          <p:cNvPr id="16" name="TextBox 15"/>
-          <p:cNvSpPr txBox="1"/>
-          <p:nvPr/>
-        </p:nvSpPr>
-        <p:spPr>
-          <a:xfrm>
-            <a:off x="6446520" y="4069080"/>
-            <a:ext cx="4937760" cy="365760"/>
+          <p:cNvPr id="19" name="TextBox 18"/>
+          <p:cNvSpPr txBox="1"/>
+          <p:nvPr/>
+        </p:nvSpPr>
+        <p:spPr>
+          <a:xfrm>
+            <a:off x="822960" y="4663440"/>
+            <a:ext cx="3108960" cy="365760"/>
           </a:xfrm>
           <a:prstGeom prst="rect">
             <a:avLst/>
@@ -18088,21 +17873,21 @@
                 </a:solidFill>
                 <a:latin typeface="Calibri"/>
               </a:rPr>
-              <a:t>Gift as a moment</a:t>
-            </a:r>
-          </a:p>
-        </p:txBody>
-      </p:sp>
-      <p:sp>
-        <p:nvSpPr>
-          <p:cNvPr id="17" name="TextBox 16"/>
-          <p:cNvSpPr txBox="1"/>
-          <p:nvPr/>
-        </p:nvSpPr>
-        <p:spPr>
-          <a:xfrm>
-            <a:off x="6446520" y="4480560"/>
-            <a:ext cx="4937760" cy="914400"/>
+              <a:t>Collector depth</a:t>
+            </a:r>
+          </a:p>
+        </p:txBody>
+      </p:sp>
+      <p:sp>
+        <p:nvSpPr>
+          <p:cNvPr id="20" name="TextBox 19"/>
+          <p:cNvSpPr txBox="1"/>
+          <p:nvPr/>
+        </p:nvSpPr>
+        <p:spPr>
+          <a:xfrm>
+            <a:off x="822960" y="5074920"/>
+            <a:ext cx="3108960" cy="822960"/>
           </a:xfrm>
           <a:prstGeom prst="rect">
             <a:avLst/>
@@ -18123,21 +17908,56 @@
                 </a:solidFill>
                 <a:latin typeface="Calibri"/>
               </a:rPr>
-              <a:t>Half the volume is gifting. We design the moment, not just the checkout.</a:t>
-            </a:r>
-          </a:p>
-        </p:txBody>
-      </p:sp>
-      <p:sp>
-        <p:nvSpPr>
-          <p:cNvPr id="18" name="Rounded Rectangle 17"/>
+              <a:t>Average pieces registered per active user</a:t>
+            </a:r>
+          </a:p>
+        </p:txBody>
+      </p:sp>
+      <p:sp>
+        <p:nvSpPr>
+          <p:cNvPr id="21" name="TextBox 20"/>
+          <p:cNvSpPr txBox="1"/>
+          <p:nvPr/>
+        </p:nvSpPr>
+        <p:spPr>
+          <a:xfrm>
+            <a:off x="822960" y="5852160"/>
+            <a:ext cx="3108960" cy="365760"/>
+          </a:xfrm>
+          <a:prstGeom prst="rect">
+            <a:avLst/>
+          </a:prstGeom>
+          <a:noFill/>
+        </p:spPr>
+        <p:txBody>
+          <a:bodyPr wrap="square" lIns="0" rIns="0" tIns="0" bIns="0" anchor="t">
+            <a:spAutoFit/>
+          </a:bodyPr>
+          <a:lstStyle/>
+          <a:p>
+            <a:pPr algn="l"/>
+            <a:r>
+              <a:rPr sz="1400" b="0">
+                <a:solidFill>
+                  <a:srgbClr val="2A1A14"/>
+                </a:solidFill>
+                <a:latin typeface="Georgia"/>
+              </a:rPr>
+              <a:t>Target ≥ 3 by month 9</a:t>
+            </a:r>
+          </a:p>
+        </p:txBody>
+      </p:sp>
+      <p:sp>
+        <p:nvSpPr>
+          <p:cNvPr id="22" name="Rounded Rectangle 21"/>
           <p:cNvSpPr/>
           <p:nvPr/>
         </p:nvSpPr>
         <p:spPr>
           <a:xfrm>
-            <a:off x="548640" y="5303520"/>
-            <a:ext cx="5486400" cy="1280160"/>
+            <a:off x="4297680" y="4480560"/>
+            <a:ext cx="3657600" cy="1828800"/>
           </a:xfrm>
           <a:prstGeom prst="roundRect">
             <a:avLst>
@@ -18178,14 +17998,14 @@
       </p:sp>
       <p:sp>
         <p:nvSpPr>
-          <p:cNvPr id="19" name="TextBox 18"/>
-          <p:cNvSpPr txBox="1"/>
-          <p:nvPr/>
-        </p:nvSpPr>
-        <p:spPr>
-          <a:xfrm>
-            <a:off x="822960" y="5486400"/>
-            <a:ext cx="4937760" cy="365760"/>
+          <p:cNvPr id="23" name="TextBox 22"/>
+          <p:cNvSpPr txBox="1"/>
+          <p:nvPr/>
+        </p:nvSpPr>
+        <p:spPr>
+          <a:xfrm>
+            <a:off x="4572000" y="4663440"/>
+            <a:ext cx="3108960" cy="365760"/>
           </a:xfrm>
           <a:prstGeom prst="rect">
             <a:avLst/>
@@ -18206,21 +18026,21 @@
                 </a:solidFill>
                 <a:latin typeface="Calibri"/>
               </a:rPr>
-              <a:t>Recognition replaces discounts</a:t>
-            </a:r>
-          </a:p>
-        </p:txBody>
-      </p:sp>
-      <p:sp>
-        <p:nvSpPr>
-          <p:cNvPr id="20" name="TextBox 19"/>
-          <p:cNvSpPr txBox="1"/>
-          <p:nvPr/>
-        </p:nvSpPr>
-        <p:spPr>
-          <a:xfrm>
-            <a:off x="822960" y="5897880"/>
-            <a:ext cx="4937760" cy="914400"/>
+              <a:t>Cross-language reach</a:t>
+            </a:r>
+          </a:p>
+        </p:txBody>
+      </p:sp>
+      <p:sp>
+        <p:nvSpPr>
+          <p:cNvPr id="24" name="TextBox 23"/>
+          <p:cNvSpPr txBox="1"/>
+          <p:nvPr/>
+        </p:nvSpPr>
+        <p:spPr>
+          <a:xfrm>
+            <a:off x="4572000" y="5074920"/>
+            <a:ext cx="3108960" cy="822960"/>
           </a:xfrm>
           <a:prstGeom prst="rect">
             <a:avLst/>
@@ -18241,21 +18061,56 @@
                 </a:solidFill>
                 <a:latin typeface="Calibri"/>
               </a:rPr>
-              <a:t>Luxury earns loyalty through access — studio visits, advance drops, signed pieces. Not coupons.</a:t>
-            </a:r>
-          </a:p>
-        </p:txBody>
-      </p:sp>
-      <p:sp>
-        <p:nvSpPr>
-          <p:cNvPr id="21" name="Rounded Rectangle 20"/>
+              <a:t>% of sessions in EN, FR, JP, ZH (non-ES)</a:t>
+            </a:r>
+          </a:p>
+        </p:txBody>
+      </p:sp>
+      <p:sp>
+        <p:nvSpPr>
+          <p:cNvPr id="25" name="TextBox 24"/>
+          <p:cNvSpPr txBox="1"/>
+          <p:nvPr/>
+        </p:nvSpPr>
+        <p:spPr>
+          <a:xfrm>
+            <a:off x="4572000" y="5852160"/>
+            <a:ext cx="3108960" cy="365760"/>
+          </a:xfrm>
+          <a:prstGeom prst="rect">
+            <a:avLst/>
+          </a:prstGeom>
+          <a:noFill/>
+        </p:spPr>
+        <p:txBody>
+          <a:bodyPr wrap="square" lIns="0" rIns="0" tIns="0" bIns="0" anchor="t">
+            <a:spAutoFit/>
+          </a:bodyPr>
+          <a:lstStyle/>
+          <a:p>
+            <a:pPr algn="l"/>
+            <a:r>
+              <a:rPr sz="1400" b="0">
+                <a:solidFill>
+                  <a:srgbClr val="2A1A14"/>
+                </a:solidFill>
+                <a:latin typeface="Georgia"/>
+              </a:rPr>
+              <a:t>Target ≥ 50% by month 12</a:t>
+            </a:r>
+          </a:p>
+        </p:txBody>
+      </p:sp>
+      <p:sp>
+        <p:nvSpPr>
+          <p:cNvPr id="26" name="Rounded Rectangle 25"/>
           <p:cNvSpPr/>
           <p:nvPr/>
         </p:nvSpPr>
         <p:spPr>
           <a:xfrm>
-            <a:off x="6172200" y="5303520"/>
-            <a:ext cx="5486400" cy="1280160"/>
+            <a:off x="8046720" y="4480560"/>
+            <a:ext cx="3657600" cy="1828800"/>
           </a:xfrm>
           <a:prstGeom prst="roundRect">
             <a:avLst>
@@ -18296,14 +18151,14 @@
       </p:sp>
       <p:sp>
         <p:nvSpPr>
-          <p:cNvPr id="22" name="TextBox 21"/>
-          <p:cNvSpPr txBox="1"/>
-          <p:nvPr/>
-        </p:nvSpPr>
-        <p:spPr>
-          <a:xfrm>
-            <a:off x="6446520" y="5486400"/>
-            <a:ext cx="4937760" cy="365760"/>
+          <p:cNvPr id="27" name="TextBox 26"/>
+          <p:cNvSpPr txBox="1"/>
+          <p:nvPr/>
+        </p:nvSpPr>
+        <p:spPr>
+          <a:xfrm>
+            <a:off x="8321040" y="4663440"/>
+            <a:ext cx="3108960" cy="365760"/>
           </a:xfrm>
           <a:prstGeom prst="rect">
             <a:avLst/>
@@ -18324,21 +18179,21 @@
                 </a:solidFill>
                 <a:latin typeface="Calibri"/>
               </a:rPr>
-              <a:t>Local trust, global voice</a:t>
-            </a:r>
-          </a:p>
-        </p:txBody>
-      </p:sp>
-      <p:sp>
-        <p:nvSpPr>
-          <p:cNvPr id="23" name="TextBox 22"/>
-          <p:cNvSpPr txBox="1"/>
-          <p:nvPr/>
-        </p:nvSpPr>
-        <p:spPr>
-          <a:xfrm>
-            <a:off x="6446520" y="5897880"/>
-            <a:ext cx="4937760" cy="914400"/>
+              <a:t>Authenticity confidence</a:t>
+            </a:r>
+          </a:p>
+        </p:txBody>
+      </p:sp>
+      <p:sp>
+        <p:nvSpPr>
+          <p:cNvPr id="28" name="TextBox 27"/>
+          <p:cNvSpPr txBox="1"/>
+          <p:nvPr/>
+        </p:nvSpPr>
+        <p:spPr>
+          <a:xfrm>
+            <a:off x="8321040" y="5074920"/>
+            <a:ext cx="3108960" cy="822960"/>
           </a:xfrm>
           <a:prstGeom prst="rect">
             <a:avLst/>
@@ -18359,14 +18214,49 @@
                 </a:solidFill>
                 <a:latin typeface="Calibri"/>
               </a:rPr>
-              <a:t>Built in México, for the world. The studio is the centre; every region is a guest of honour.</a:t>
-            </a:r>
-          </a:p>
-        </p:txBody>
-      </p:sp>
-      <p:sp>
-        <p:nvSpPr>
-          <p:cNvPr id="24" name="TextBox 23"/>
+              <a:t>% of pieces verified through the in-app authenticity flow</a:t>
+            </a:r>
+          </a:p>
+        </p:txBody>
+      </p:sp>
+      <p:sp>
+        <p:nvSpPr>
+          <p:cNvPr id="29" name="TextBox 28"/>
+          <p:cNvSpPr txBox="1"/>
+          <p:nvPr/>
+        </p:nvSpPr>
+        <p:spPr>
+          <a:xfrm>
+            <a:off x="8321040" y="5852160"/>
+            <a:ext cx="3108960" cy="365760"/>
+          </a:xfrm>
+          <a:prstGeom prst="rect">
+            <a:avLst/>
+          </a:prstGeom>
+          <a:noFill/>
+        </p:spPr>
+        <p:txBody>
+          <a:bodyPr wrap="square" lIns="0" rIns="0" tIns="0" bIns="0" anchor="t">
+            <a:spAutoFit/>
+          </a:bodyPr>
+          <a:lstStyle/>
+          <a:p>
+            <a:pPr algn="l"/>
+            <a:r>
+              <a:rPr sz="1400" b="0">
+                <a:solidFill>
+                  <a:srgbClr val="2A1A14"/>
+                </a:solidFill>
+                <a:latin typeface="Georgia"/>
+              </a:rPr>
+              <a:t>Target ≥ 70% of new sales</a:t>
+            </a:r>
+          </a:p>
+        </p:txBody>
+      </p:sp>
+      <p:sp>
+        <p:nvSpPr>
+          <p:cNvPr id="30" name="TextBox 29"/>
           <p:cNvSpPr txBox="1"/>
           <p:nvPr/>
         </p:nvSpPr>
@@ -18401,7 +18291,7 @@
       </p:sp>
       <p:sp>
         <p:nvSpPr>
-          <p:cNvPr id="25" name="TextBox 24"/>
+          <p:cNvPr id="31" name="TextBox 30"/>
           <p:cNvSpPr txBox="1"/>
           <p:nvPr/>
         </p:nvSpPr>
@@ -18429,7 +18319,7 @@
                 </a:solidFill>
                 <a:latin typeface="Calibri"/>
               </a:rPr>
-              <a:t>19 / 22</a:t>
+              <a:t>19 / 23</a:t>
             </a:r>
           </a:p>
         </p:txBody>
@@ -19169,7 +19059,7 @@
                 </a:solidFill>
                 <a:latin typeface="Calibri"/>
               </a:rPr>
-              <a:t>2 / 22</a:t>
+              <a:t>2 / 23</a:t>
             </a:r>
           </a:p>
         </p:txBody>
@@ -19266,7 +19156,7 @@
                 </a:solidFill>
                 <a:latin typeface="Calibri"/>
               </a:rPr>
-              <a:t>WORKING TOGETHER</a:t>
+              <a:t>HOW IT WILL FEEL</a:t>
             </a:r>
           </a:p>
         </p:txBody>
@@ -19301,7 +19191,7 @@
                 </a:solidFill>
                 <a:latin typeface="Georgia"/>
               </a:rPr>
-              <a:t>How we'd partner.</a:t>
+              <a:t>Design principles.</a:t>
             </a:r>
           </a:p>
         </p:txBody>
@@ -19357,8 +19247,8 @@
         </p:nvSpPr>
         <p:spPr>
           <a:xfrm>
-            <a:off x="548640" y="2286000"/>
-            <a:ext cx="5486400" cy="1828800"/>
+            <a:off x="548640" y="2468880"/>
+            <a:ext cx="5486400" cy="1280160"/>
           </a:xfrm>
           <a:prstGeom prst="roundRect">
             <a:avLst>
@@ -19405,29 +19295,29 @@
         </p:nvSpPr>
         <p:spPr>
           <a:xfrm>
-            <a:off x="822960" y="2560320"/>
-            <a:ext cx="4937760" cy="457200"/>
-          </a:xfrm>
-          <a:prstGeom prst="rect">
-            <a:avLst/>
-          </a:prstGeom>
-          <a:noFill/>
-        </p:spPr>
-        <p:txBody>
-          <a:bodyPr wrap="square" lIns="0" rIns="0" tIns="0" bIns="0" anchor="t">
-            <a:spAutoFit/>
-          </a:bodyPr>
-          <a:lstStyle/>
-          <a:p>
-            <a:pPr algn="l"/>
-            <a:r>
-              <a:rPr sz="2000" b="0">
+            <a:off x="822960" y="2651760"/>
+            <a:ext cx="4937760" cy="365760"/>
+          </a:xfrm>
+          <a:prstGeom prst="rect">
+            <a:avLst/>
+          </a:prstGeom>
+          <a:noFill/>
+        </p:spPr>
+        <p:txBody>
+          <a:bodyPr wrap="square" lIns="0" rIns="0" tIns="0" bIns="0" anchor="t">
+            <a:spAutoFit/>
+          </a:bodyPr>
+          <a:lstStyle/>
+          <a:p>
+            <a:pPr algn="l"/>
+            <a:r>
+              <a:rPr sz="1400" b="1">
                 <a:solidFill>
                   <a:srgbClr val="A02747"/>
                 </a:solidFill>
-                <a:latin typeface="Georgia"/>
-              </a:rPr>
-              <a:t>Discovery sprint</a:t>
+                <a:latin typeface="Calibri"/>
+              </a:rPr>
+              <a:t>Calm, never kitsch</a:t>
             </a:r>
           </a:p>
         </p:txBody>
@@ -19440,29 +19330,29 @@
         </p:nvSpPr>
         <p:spPr>
           <a:xfrm>
-            <a:off x="822960" y="3154680"/>
-            <a:ext cx="4937760" cy="1005840"/>
-          </a:xfrm>
-          <a:prstGeom prst="rect">
-            <a:avLst/>
-          </a:prstGeom>
-          <a:noFill/>
-        </p:spPr>
-        <p:txBody>
-          <a:bodyPr wrap="square" lIns="0" rIns="0" tIns="0" bIns="0" anchor="t">
-            <a:spAutoFit/>
-          </a:bodyPr>
-          <a:lstStyle/>
-          <a:p>
-            <a:pPr algn="l"/>
-            <a:r>
-              <a:rPr sz="1200" b="0">
+            <a:off x="822960" y="3063240"/>
+            <a:ext cx="4937760" cy="914400"/>
+          </a:xfrm>
+          <a:prstGeom prst="rect">
+            <a:avLst/>
+          </a:prstGeom>
+          <a:noFill/>
+        </p:spPr>
+        <p:txBody>
+          <a:bodyPr wrap="square" lIns="0" rIns="0" tIns="0" bIns="0" anchor="t">
+            <a:spAutoFit/>
+          </a:bodyPr>
+          <a:lstStyle/>
+          <a:p>
+            <a:pPr algn="l"/>
+            <a:r>
+              <a:rPr sz="1100" b="0">
                 <a:solidFill>
                   <a:srgbClr val="8A7866"/>
                 </a:solidFill>
                 <a:latin typeface="Calibri"/>
               </a:rPr>
-              <a:t>Two weeks. We sit at the Polanco studio. Talk to ten of your customers — tourist, collector, corporate gifter, three regions. Walk away with a signed Phase 1 scope, even if you don't build with us.</a:t>
+              <a:t>The motifs are bold; the interface is restrained. The silk does the talking.</a:t>
             </a:r>
           </a:p>
         </p:txBody>
@@ -19475,8 +19365,8 @@
         </p:nvSpPr>
         <p:spPr>
           <a:xfrm>
-            <a:off x="6172200" y="2286000"/>
-            <a:ext cx="5486400" cy="1828800"/>
+            <a:off x="6172200" y="2468880"/>
+            <a:ext cx="5486400" cy="1280160"/>
           </a:xfrm>
           <a:prstGeom prst="roundRect">
             <a:avLst>
@@ -19523,29 +19413,29 @@
         </p:nvSpPr>
         <p:spPr>
           <a:xfrm>
-            <a:off x="6446520" y="2560320"/>
-            <a:ext cx="4937760" cy="457200"/>
-          </a:xfrm>
-          <a:prstGeom prst="rect">
-            <a:avLst/>
-          </a:prstGeom>
-          <a:noFill/>
-        </p:spPr>
-        <p:txBody>
-          <a:bodyPr wrap="square" lIns="0" rIns="0" tIns="0" bIns="0" anchor="t">
-            <a:spAutoFit/>
-          </a:bodyPr>
-          <a:lstStyle/>
-          <a:p>
-            <a:pPr algn="l"/>
-            <a:r>
-              <a:rPr sz="2000" b="0">
+            <a:off x="6446520" y="2651760"/>
+            <a:ext cx="4937760" cy="365760"/>
+          </a:xfrm>
+          <a:prstGeom prst="rect">
+            <a:avLst/>
+          </a:prstGeom>
+          <a:noFill/>
+        </p:spPr>
+        <p:txBody>
+          <a:bodyPr wrap="square" lIns="0" rIns="0" tIns="0" bIns="0" anchor="t">
+            <a:spAutoFit/>
+          </a:bodyPr>
+          <a:lstStyle/>
+          <a:p>
+            <a:pPr algn="l"/>
+            <a:r>
+              <a:rPr sz="1400" b="1">
                 <a:solidFill>
                   <a:srgbClr val="A02747"/>
                 </a:solidFill>
-                <a:latin typeface="Georgia"/>
-              </a:rPr>
-              <a:t>Embedded delivery</a:t>
+                <a:latin typeface="Calibri"/>
+              </a:rPr>
+              <a:t>Language is welcome</a:t>
             </a:r>
           </a:p>
         </p:txBody>
@@ -19558,29 +19448,29 @@
         </p:nvSpPr>
         <p:spPr>
           <a:xfrm>
-            <a:off x="6446520" y="3154680"/>
-            <a:ext cx="4937760" cy="1005840"/>
-          </a:xfrm>
-          <a:prstGeom prst="rect">
-            <a:avLst/>
-          </a:prstGeom>
-          <a:noFill/>
-        </p:spPr>
-        <p:txBody>
-          <a:bodyPr wrap="square" lIns="0" rIns="0" tIns="0" bIns="0" anchor="t">
-            <a:spAutoFit/>
-          </a:bodyPr>
-          <a:lstStyle/>
-          <a:p>
-            <a:pPr algn="l"/>
-            <a:r>
-              <a:rPr sz="1200" b="0">
+            <a:off x="6446520" y="3063240"/>
+            <a:ext cx="4937760" cy="914400"/>
+          </a:xfrm>
+          <a:prstGeom prst="rect">
+            <a:avLst/>
+          </a:prstGeom>
+          <a:noFill/>
+        </p:spPr>
+        <p:txBody>
+          <a:bodyPr wrap="square" lIns="0" rIns="0" tIns="0" bIns="0" anchor="t">
+            <a:spAutoFit/>
+          </a:bodyPr>
+          <a:lstStyle/>
+          <a:p>
+            <a:pPr algn="l"/>
+            <a:r>
+              <a:rPr sz="1100" b="0">
                 <a:solidFill>
                   <a:srgbClr val="8A7866"/>
                 </a:solidFill>
                 <a:latin typeface="Calibri"/>
               </a:rPr>
-              <a:t>A small team — a lead engineer, a mobile engineer, a designer, a Spanish-language QA — works as an extension of yours. Weekly demos, never a black box.</a:t>
+              <a:t>Every customer's first language matters. Translation is cultural, not literal.</a:t>
             </a:r>
           </a:p>
         </p:txBody>
@@ -19593,8 +19483,8 @@
         </p:nvSpPr>
         <p:spPr>
           <a:xfrm>
-            <a:off x="548640" y="4251960"/>
-            <a:ext cx="5486400" cy="1828800"/>
+            <a:off x="548640" y="3886200"/>
+            <a:ext cx="5486400" cy="1280160"/>
           </a:xfrm>
           <a:prstGeom prst="roundRect">
             <a:avLst>
@@ -19641,29 +19531,29 @@
         </p:nvSpPr>
         <p:spPr>
           <a:xfrm>
-            <a:off x="822960" y="4526280"/>
-            <a:ext cx="4937760" cy="457200"/>
-          </a:xfrm>
-          <a:prstGeom prst="rect">
-            <a:avLst/>
-          </a:prstGeom>
-          <a:noFill/>
-        </p:spPr>
-        <p:txBody>
-          <a:bodyPr wrap="square" lIns="0" rIns="0" tIns="0" bIns="0" anchor="t">
-            <a:spAutoFit/>
-          </a:bodyPr>
-          <a:lstStyle/>
-          <a:p>
-            <a:pPr algn="l"/>
-            <a:r>
-              <a:rPr sz="2000" b="0">
+            <a:off x="822960" y="4069080"/>
+            <a:ext cx="4937760" cy="365760"/>
+          </a:xfrm>
+          <a:prstGeom prst="rect">
+            <a:avLst/>
+          </a:prstGeom>
+          <a:noFill/>
+        </p:spPr>
+        <p:txBody>
+          <a:bodyPr wrap="square" lIns="0" rIns="0" tIns="0" bIns="0" anchor="t">
+            <a:spAutoFit/>
+          </a:bodyPr>
+          <a:lstStyle/>
+          <a:p>
+            <a:pPr algn="l"/>
+            <a:r>
+              <a:rPr sz="1400" b="1">
                 <a:solidFill>
                   <a:srgbClr val="A02747"/>
                 </a:solidFill>
-                <a:latin typeface="Georgia"/>
-              </a:rPr>
-              <a:t>Cultural review</a:t>
+                <a:latin typeface="Calibri"/>
+              </a:rPr>
+              <a:t>Authenticity above all</a:t>
             </a:r>
           </a:p>
         </p:txBody>
@@ -19676,29 +19566,29 @@
         </p:nvSpPr>
         <p:spPr>
           <a:xfrm>
-            <a:off x="822960" y="5120640"/>
-            <a:ext cx="4937760" cy="1005840"/>
-          </a:xfrm>
-          <a:prstGeom prst="rect">
-            <a:avLst/>
-          </a:prstGeom>
-          <a:noFill/>
-        </p:spPr>
-        <p:txBody>
-          <a:bodyPr wrap="square" lIns="0" rIns="0" tIns="0" bIns="0" anchor="t">
-            <a:spAutoFit/>
-          </a:bodyPr>
-          <a:lstStyle/>
-          <a:p>
-            <a:pPr algn="l"/>
-            <a:r>
-              <a:rPr sz="1200" b="0">
+            <a:off x="822960" y="4480560"/>
+            <a:ext cx="4937760" cy="914400"/>
+          </a:xfrm>
+          <a:prstGeom prst="rect">
+            <a:avLst/>
+          </a:prstGeom>
+          <a:noFill/>
+        </p:spPr>
+        <p:txBody>
+          <a:bodyPr wrap="square" lIns="0" rIns="0" tIns="0" bIns="0" anchor="t">
+            <a:spAutoFit/>
+          </a:bodyPr>
+          <a:lstStyle/>
+          <a:p>
+            <a:pPr algn="l"/>
+            <a:r>
+              <a:rPr sz="1100" b="0">
                 <a:solidFill>
                   <a:srgbClr val="8A7866"/>
                 </a:solidFill>
                 <a:latin typeface="Calibri"/>
               </a:rPr>
-              <a:t>Every customer-facing string of cultural content reviewed by a curator the brand chooses. AI generates; humans approve.</a:t>
+              <a:t>AI never generates final designs or motifs. The cultural craft is the brand. Guard it.</a:t>
             </a:r>
           </a:p>
         </p:txBody>
@@ -19711,8 +19601,8 @@
         </p:nvSpPr>
         <p:spPr>
           <a:xfrm>
-            <a:off x="6172200" y="4251960"/>
-            <a:ext cx="5486400" cy="1828800"/>
+            <a:off x="6172200" y="3886200"/>
+            <a:ext cx="5486400" cy="1280160"/>
           </a:xfrm>
           <a:prstGeom prst="roundRect">
             <a:avLst>
@@ -19759,29 +19649,29 @@
         </p:nvSpPr>
         <p:spPr>
           <a:xfrm>
-            <a:off x="6446520" y="4526280"/>
-            <a:ext cx="4937760" cy="457200"/>
-          </a:xfrm>
-          <a:prstGeom prst="rect">
-            <a:avLst/>
-          </a:prstGeom>
-          <a:noFill/>
-        </p:spPr>
-        <p:txBody>
-          <a:bodyPr wrap="square" lIns="0" rIns="0" tIns="0" bIns="0" anchor="t">
-            <a:spAutoFit/>
-          </a:bodyPr>
-          <a:lstStyle/>
-          <a:p>
-            <a:pPr algn="l"/>
-            <a:r>
-              <a:rPr sz="2000" b="0">
+            <a:off x="6446520" y="4069080"/>
+            <a:ext cx="4937760" cy="365760"/>
+          </a:xfrm>
+          <a:prstGeom prst="rect">
+            <a:avLst/>
+          </a:prstGeom>
+          <a:noFill/>
+        </p:spPr>
+        <p:txBody>
+          <a:bodyPr wrap="square" lIns="0" rIns="0" tIns="0" bIns="0" anchor="t">
+            <a:spAutoFit/>
+          </a:bodyPr>
+          <a:lstStyle/>
+          <a:p>
+            <a:pPr algn="l"/>
+            <a:r>
+              <a:rPr sz="1400" b="1">
                 <a:solidFill>
                   <a:srgbClr val="A02747"/>
                 </a:solidFill>
-                <a:latin typeface="Georgia"/>
-              </a:rPr>
-              <a:t>Always your data</a:t>
+                <a:latin typeface="Calibri"/>
+              </a:rPr>
+              <a:t>Gift as a moment</a:t>
             </a:r>
           </a:p>
         </p:txBody>
@@ -19794,36 +19684,272 @@
         </p:nvSpPr>
         <p:spPr>
           <a:xfrm>
-            <a:off x="6446520" y="5120640"/>
-            <a:ext cx="4937760" cy="1005840"/>
-          </a:xfrm>
-          <a:prstGeom prst="rect">
-            <a:avLst/>
-          </a:prstGeom>
-          <a:noFill/>
-        </p:spPr>
-        <p:txBody>
-          <a:bodyPr wrap="square" lIns="0" rIns="0" tIns="0" bIns="0" anchor="t">
-            <a:spAutoFit/>
-          </a:bodyPr>
-          <a:lstStyle/>
-          <a:p>
-            <a:pPr algn="l"/>
-            <a:r>
-              <a:rPr sz="1200" b="0">
+            <a:off x="6446520" y="4480560"/>
+            <a:ext cx="4937760" cy="914400"/>
+          </a:xfrm>
+          <a:prstGeom prst="rect">
+            <a:avLst/>
+          </a:prstGeom>
+          <a:noFill/>
+        </p:spPr>
+        <p:txBody>
+          <a:bodyPr wrap="square" lIns="0" rIns="0" tIns="0" bIns="0" anchor="t">
+            <a:spAutoFit/>
+          </a:bodyPr>
+          <a:lstStyle/>
+          <a:p>
+            <a:pPr algn="l"/>
+            <a:r>
+              <a:rPr sz="1100" b="0">
                 <a:solidFill>
                   <a:srgbClr val="8A7866"/>
                 </a:solidFill>
                 <a:latin typeface="Calibri"/>
               </a:rPr>
-              <a:t>Source code, customer data, model logs all live in your accounts. Multi-region storage to honour data-residency rules.</a:t>
-            </a:r>
-          </a:p>
-        </p:txBody>
-      </p:sp>
-      <p:sp>
-        <p:nvSpPr>
-          <p:cNvPr id="18" name="TextBox 17"/>
+              <a:t>Half the volume is gifting. We design the moment, not just the checkout.</a:t>
+            </a:r>
+          </a:p>
+        </p:txBody>
+      </p:sp>
+      <p:sp>
+        <p:nvSpPr>
+          <p:cNvPr id="18" name="Rounded Rectangle 17"/>
+          <p:cNvSpPr/>
+          <p:nvPr/>
+        </p:nvSpPr>
+        <p:spPr>
+          <a:xfrm>
+            <a:off x="548640" y="5303520"/>
+            <a:ext cx="5486400" cy="1280160"/>
+          </a:xfrm>
+          <a:prstGeom prst="roundRect">
+            <a:avLst>
+              <a:gd name="adj" fmla="val 12000"/>
+            </a:avLst>
+          </a:prstGeom>
+          <a:solidFill>
+            <a:srgbClr val="FFFFFF"/>
+          </a:solidFill>
+          <a:ln w="9525">
+            <a:solidFill>
+              <a:srgbClr val="E6D9C0"/>
+            </a:solidFill>
+          </a:ln>
+          <a:effectLst/>
+        </p:spPr>
+        <p:style>
+          <a:lnRef idx="1">
+            <a:schemeClr val="accent1"/>
+          </a:lnRef>
+          <a:fillRef idx="3">
+            <a:schemeClr val="accent1"/>
+          </a:fillRef>
+          <a:effectRef idx="2">
+            <a:schemeClr val="accent1"/>
+          </a:effectRef>
+          <a:fontRef idx="minor">
+            <a:schemeClr val="lt1"/>
+          </a:fontRef>
+        </p:style>
+        <p:txBody>
+          <a:bodyPr rtlCol="0" anchor="ctr"/>
+          <a:lstStyle/>
+          <a:p>
+            <a:pPr algn="ctr"/>
+          </a:p>
+        </p:txBody>
+      </p:sp>
+      <p:sp>
+        <p:nvSpPr>
+          <p:cNvPr id="19" name="TextBox 18"/>
+          <p:cNvSpPr txBox="1"/>
+          <p:nvPr/>
+        </p:nvSpPr>
+        <p:spPr>
+          <a:xfrm>
+            <a:off x="822960" y="5486400"/>
+            <a:ext cx="4937760" cy="365760"/>
+          </a:xfrm>
+          <a:prstGeom prst="rect">
+            <a:avLst/>
+          </a:prstGeom>
+          <a:noFill/>
+        </p:spPr>
+        <p:txBody>
+          <a:bodyPr wrap="square" lIns="0" rIns="0" tIns="0" bIns="0" anchor="t">
+            <a:spAutoFit/>
+          </a:bodyPr>
+          <a:lstStyle/>
+          <a:p>
+            <a:pPr algn="l"/>
+            <a:r>
+              <a:rPr sz="1400" b="1">
+                <a:solidFill>
+                  <a:srgbClr val="A02747"/>
+                </a:solidFill>
+                <a:latin typeface="Calibri"/>
+              </a:rPr>
+              <a:t>Recognition replaces discounts</a:t>
+            </a:r>
+          </a:p>
+        </p:txBody>
+      </p:sp>
+      <p:sp>
+        <p:nvSpPr>
+          <p:cNvPr id="20" name="TextBox 19"/>
+          <p:cNvSpPr txBox="1"/>
+          <p:nvPr/>
+        </p:nvSpPr>
+        <p:spPr>
+          <a:xfrm>
+            <a:off x="822960" y="5897880"/>
+            <a:ext cx="4937760" cy="914400"/>
+          </a:xfrm>
+          <a:prstGeom prst="rect">
+            <a:avLst/>
+          </a:prstGeom>
+          <a:noFill/>
+        </p:spPr>
+        <p:txBody>
+          <a:bodyPr wrap="square" lIns="0" rIns="0" tIns="0" bIns="0" anchor="t">
+            <a:spAutoFit/>
+          </a:bodyPr>
+          <a:lstStyle/>
+          <a:p>
+            <a:pPr algn="l"/>
+            <a:r>
+              <a:rPr sz="1100" b="0">
+                <a:solidFill>
+                  <a:srgbClr val="8A7866"/>
+                </a:solidFill>
+                <a:latin typeface="Calibri"/>
+              </a:rPr>
+              <a:t>Luxury earns loyalty through access — studio visits, advance drops, signed pieces. Not coupons.</a:t>
+            </a:r>
+          </a:p>
+        </p:txBody>
+      </p:sp>
+      <p:sp>
+        <p:nvSpPr>
+          <p:cNvPr id="21" name="Rounded Rectangle 20"/>
+          <p:cNvSpPr/>
+          <p:nvPr/>
+        </p:nvSpPr>
+        <p:spPr>
+          <a:xfrm>
+            <a:off x="6172200" y="5303520"/>
+            <a:ext cx="5486400" cy="1280160"/>
+          </a:xfrm>
+          <a:prstGeom prst="roundRect">
+            <a:avLst>
+              <a:gd name="adj" fmla="val 12000"/>
+            </a:avLst>
+          </a:prstGeom>
+          <a:solidFill>
+            <a:srgbClr val="FFFFFF"/>
+          </a:solidFill>
+          <a:ln w="9525">
+            <a:solidFill>
+              <a:srgbClr val="E6D9C0"/>
+            </a:solidFill>
+          </a:ln>
+          <a:effectLst/>
+        </p:spPr>
+        <p:style>
+          <a:lnRef idx="1">
+            <a:schemeClr val="accent1"/>
+          </a:lnRef>
+          <a:fillRef idx="3">
+            <a:schemeClr val="accent1"/>
+          </a:fillRef>
+          <a:effectRef idx="2">
+            <a:schemeClr val="accent1"/>
+          </a:effectRef>
+          <a:fontRef idx="minor">
+            <a:schemeClr val="lt1"/>
+          </a:fontRef>
+        </p:style>
+        <p:txBody>
+          <a:bodyPr rtlCol="0" anchor="ctr"/>
+          <a:lstStyle/>
+          <a:p>
+            <a:pPr algn="ctr"/>
+          </a:p>
+        </p:txBody>
+      </p:sp>
+      <p:sp>
+        <p:nvSpPr>
+          <p:cNvPr id="22" name="TextBox 21"/>
+          <p:cNvSpPr txBox="1"/>
+          <p:nvPr/>
+        </p:nvSpPr>
+        <p:spPr>
+          <a:xfrm>
+            <a:off x="6446520" y="5486400"/>
+            <a:ext cx="4937760" cy="365760"/>
+          </a:xfrm>
+          <a:prstGeom prst="rect">
+            <a:avLst/>
+          </a:prstGeom>
+          <a:noFill/>
+        </p:spPr>
+        <p:txBody>
+          <a:bodyPr wrap="square" lIns="0" rIns="0" tIns="0" bIns="0" anchor="t">
+            <a:spAutoFit/>
+          </a:bodyPr>
+          <a:lstStyle/>
+          <a:p>
+            <a:pPr algn="l"/>
+            <a:r>
+              <a:rPr sz="1400" b="1">
+                <a:solidFill>
+                  <a:srgbClr val="A02747"/>
+                </a:solidFill>
+                <a:latin typeface="Calibri"/>
+              </a:rPr>
+              <a:t>Local trust, global voice</a:t>
+            </a:r>
+          </a:p>
+        </p:txBody>
+      </p:sp>
+      <p:sp>
+        <p:nvSpPr>
+          <p:cNvPr id="23" name="TextBox 22"/>
+          <p:cNvSpPr txBox="1"/>
+          <p:nvPr/>
+        </p:nvSpPr>
+        <p:spPr>
+          <a:xfrm>
+            <a:off x="6446520" y="5897880"/>
+            <a:ext cx="4937760" cy="914400"/>
+          </a:xfrm>
+          <a:prstGeom prst="rect">
+            <a:avLst/>
+          </a:prstGeom>
+          <a:noFill/>
+        </p:spPr>
+        <p:txBody>
+          <a:bodyPr wrap="square" lIns="0" rIns="0" tIns="0" bIns="0" anchor="t">
+            <a:spAutoFit/>
+          </a:bodyPr>
+          <a:lstStyle/>
+          <a:p>
+            <a:pPr algn="l"/>
+            <a:r>
+              <a:rPr sz="1100" b="0">
+                <a:solidFill>
+                  <a:srgbClr val="8A7866"/>
+                </a:solidFill>
+                <a:latin typeface="Calibri"/>
+              </a:rPr>
+              <a:t>Built in México, for the world. The studio is the centre; every region is a guest of honour.</a:t>
+            </a:r>
+          </a:p>
+        </p:txBody>
+      </p:sp>
+      <p:sp>
+        <p:nvSpPr>
+          <p:cNvPr id="24" name="TextBox 23"/>
           <p:cNvSpPr txBox="1"/>
           <p:nvPr/>
         </p:nvSpPr>
@@ -19858,7 +19984,7 @@
       </p:sp>
       <p:sp>
         <p:nvSpPr>
-          <p:cNvPr id="19" name="TextBox 18"/>
+          <p:cNvPr id="25" name="TextBox 24"/>
           <p:cNvSpPr txBox="1"/>
           <p:nvPr/>
         </p:nvSpPr>
@@ -19886,7 +20012,7 @@
                 </a:solidFill>
                 <a:latin typeface="Calibri"/>
               </a:rPr>
-              <a:t>20 / 22</a:t>
+              <a:t>20 / 23</a:t>
             </a:r>
           </a:p>
         </p:txBody>
@@ -19983,7 +20109,7 @@
                 </a:solidFill>
                 <a:latin typeface="Calibri"/>
               </a:rPr>
-              <a:t>WHY THIS WORKS FOR PINEDA COVALÍN</a:t>
+              <a:t>WORKING TOGETHER</a:t>
             </a:r>
           </a:p>
         </p:txBody>
@@ -20018,7 +20144,7 @@
                 </a:solidFill>
                 <a:latin typeface="Georgia"/>
               </a:rPr>
-              <a:t>The bet behind the build.</a:t>
+              <a:t>How we'd partner.</a:t>
             </a:r>
           </a:p>
         </p:txBody>
@@ -20068,23 +20194,27 @@
       </p:sp>
       <p:sp>
         <p:nvSpPr>
-          <p:cNvPr id="6" name="Rectangle 5"/>
+          <p:cNvPr id="6" name="Rounded Rectangle 5"/>
           <p:cNvSpPr/>
           <p:nvPr/>
         </p:nvSpPr>
         <p:spPr>
           <a:xfrm>
             <a:off x="548640" y="2286000"/>
-            <a:ext cx="73152" cy="868680"/>
-          </a:xfrm>
-          <a:prstGeom prst="rect">
-            <a:avLst/>
+            <a:ext cx="5486400" cy="1828800"/>
+          </a:xfrm>
+          <a:prstGeom prst="roundRect">
+            <a:avLst>
+              <a:gd name="adj" fmla="val 12000"/>
+            </a:avLst>
           </a:prstGeom>
           <a:solidFill>
-            <a:srgbClr val="A02747"/>
+            <a:srgbClr val="FFFFFF"/>
           </a:solidFill>
-          <a:ln>
-            <a:noFill/>
+          <a:ln w="9525">
+            <a:solidFill>
+              <a:srgbClr val="E6D9C0"/>
+            </a:solidFill>
           </a:ln>
           <a:effectLst/>
         </p:spPr>
@@ -20118,8 +20248,8 @@
         </p:nvSpPr>
         <p:spPr>
           <a:xfrm>
-            <a:off x="868680" y="2331720"/>
-            <a:ext cx="10515600" cy="365760"/>
+            <a:off x="822960" y="2560320"/>
+            <a:ext cx="4937760" cy="457200"/>
           </a:xfrm>
           <a:prstGeom prst="rect">
             <a:avLst/>
@@ -20136,11 +20266,11 @@
             <a:r>
               <a:rPr sz="2000" b="0">
                 <a:solidFill>
-                  <a:srgbClr val="2A1A14"/>
+                  <a:srgbClr val="A02747"/>
                 </a:solidFill>
                 <a:latin typeface="Georgia"/>
               </a:rPr>
-              <a:t>Your story is your moat</a:t>
+              <a:t>Discovery sprint</a:t>
             </a:r>
           </a:p>
         </p:txBody>
@@ -20153,8 +20283,8 @@
         </p:nvSpPr>
         <p:spPr>
           <a:xfrm>
-            <a:off x="868680" y="2788920"/>
-            <a:ext cx="10515600" cy="365760"/>
+            <a:off x="822960" y="3154680"/>
+            <a:ext cx="4937760" cy="1005840"/>
           </a:xfrm>
           <a:prstGeom prst="rect">
             <a:avLst/>
@@ -20175,30 +20305,34 @@
                 </a:solidFill>
                 <a:latin typeface="Calibri"/>
               </a:rPr>
-              <a:t>No global luxury house can claim authentic Mexican cultural craft. The Atelier passport puts that authority in the customer's hand, in their language.</a:t>
-            </a:r>
-          </a:p>
-        </p:txBody>
-      </p:sp>
-      <p:sp>
-        <p:nvSpPr>
-          <p:cNvPr id="9" name="Rectangle 8"/>
+              <a:t>Two weeks. We sit at the Polanco studio. Talk to ten of your customers — tourist, collector, corporate gifter, three regions. Walk away with a signed Phase 1 scope, even if you don't build with us.</a:t>
+            </a:r>
+          </a:p>
+        </p:txBody>
+      </p:sp>
+      <p:sp>
+        <p:nvSpPr>
+          <p:cNvPr id="9" name="Rounded Rectangle 8"/>
           <p:cNvSpPr/>
           <p:nvPr/>
         </p:nvSpPr>
         <p:spPr>
           <a:xfrm>
-            <a:off x="548640" y="3246120"/>
-            <a:ext cx="73152" cy="868680"/>
-          </a:xfrm>
-          <a:prstGeom prst="rect">
-            <a:avLst/>
+            <a:off x="6172200" y="2286000"/>
+            <a:ext cx="5486400" cy="1828800"/>
+          </a:xfrm>
+          <a:prstGeom prst="roundRect">
+            <a:avLst>
+              <a:gd name="adj" fmla="val 12000"/>
+            </a:avLst>
           </a:prstGeom>
           <a:solidFill>
-            <a:srgbClr val="A02747"/>
+            <a:srgbClr val="FFFFFF"/>
           </a:solidFill>
-          <a:ln>
-            <a:noFill/>
+          <a:ln w="9525">
+            <a:solidFill>
+              <a:srgbClr val="E6D9C0"/>
+            </a:solidFill>
           </a:ln>
           <a:effectLst/>
         </p:spPr>
@@ -20232,8 +20366,8 @@
         </p:nvSpPr>
         <p:spPr>
           <a:xfrm>
-            <a:off x="868680" y="3291840"/>
-            <a:ext cx="10515600" cy="365760"/>
+            <a:off x="6446520" y="2560320"/>
+            <a:ext cx="4937760" cy="457200"/>
           </a:xfrm>
           <a:prstGeom prst="rect">
             <a:avLst/>
@@ -20250,11 +20384,11 @@
             <a:r>
               <a:rPr sz="2000" b="0">
                 <a:solidFill>
-                  <a:srgbClr val="2A1A14"/>
+                  <a:srgbClr val="A02747"/>
                 </a:solidFill>
                 <a:latin typeface="Georgia"/>
               </a:rPr>
-              <a:t>The tourist is your hidden customer</a:t>
+              <a:t>Embedded delivery</a:t>
             </a:r>
           </a:p>
         </p:txBody>
@@ -20267,8 +20401,8 @@
         </p:nvSpPr>
         <p:spPr>
           <a:xfrm>
-            <a:off x="868680" y="3749040"/>
-            <a:ext cx="10515600" cy="365760"/>
+            <a:off x="6446520" y="3154680"/>
+            <a:ext cx="4937760" cy="1005840"/>
           </a:xfrm>
           <a:prstGeom prst="rect">
             <a:avLst/>
@@ -20289,30 +20423,34 @@
                 </a:solidFill>
                 <a:latin typeface="Calibri"/>
               </a:rPr>
-              <a:t>40% of your sales walk away never to return. The app makes them collectors. Even a 10% retention shift is the largest growth lever you have.</a:t>
-            </a:r>
-          </a:p>
-        </p:txBody>
-      </p:sp>
-      <p:sp>
-        <p:nvSpPr>
-          <p:cNvPr id="12" name="Rectangle 11"/>
+              <a:t>A small team — a lead engineer, a mobile engineer, a designer, a Spanish-language QA — works as an extension of yours. Weekly demos, never a black box.</a:t>
+            </a:r>
+          </a:p>
+        </p:txBody>
+      </p:sp>
+      <p:sp>
+        <p:nvSpPr>
+          <p:cNvPr id="12" name="Rounded Rectangle 11"/>
           <p:cNvSpPr/>
           <p:nvPr/>
         </p:nvSpPr>
         <p:spPr>
           <a:xfrm>
-            <a:off x="548640" y="4206240"/>
-            <a:ext cx="73152" cy="868680"/>
-          </a:xfrm>
-          <a:prstGeom prst="rect">
-            <a:avLst/>
+            <a:off x="548640" y="4251960"/>
+            <a:ext cx="5486400" cy="1828800"/>
+          </a:xfrm>
+          <a:prstGeom prst="roundRect">
+            <a:avLst>
+              <a:gd name="adj" fmla="val 12000"/>
+            </a:avLst>
           </a:prstGeom>
           <a:solidFill>
-            <a:srgbClr val="A02747"/>
+            <a:srgbClr val="FFFFFF"/>
           </a:solidFill>
-          <a:ln>
-            <a:noFill/>
+          <a:ln w="9525">
+            <a:solidFill>
+              <a:srgbClr val="E6D9C0"/>
+            </a:solidFill>
           </a:ln>
           <a:effectLst/>
         </p:spPr>
@@ -20346,8 +20484,8 @@
         </p:nvSpPr>
         <p:spPr>
           <a:xfrm>
-            <a:off x="868680" y="4251960"/>
-            <a:ext cx="10515600" cy="365760"/>
+            <a:off x="822960" y="4526280"/>
+            <a:ext cx="4937760" cy="457200"/>
           </a:xfrm>
           <a:prstGeom prst="rect">
             <a:avLst/>
@@ -20364,11 +20502,11 @@
             <a:r>
               <a:rPr sz="2000" b="0">
                 <a:solidFill>
-                  <a:srgbClr val="2A1A14"/>
+                  <a:srgbClr val="A02747"/>
                 </a:solidFill>
                 <a:latin typeface="Georgia"/>
               </a:rPr>
-              <a:t>The gift is a Trojan horse</a:t>
+              <a:t>Cultural review</a:t>
             </a:r>
           </a:p>
         </p:txBody>
@@ -20381,8 +20519,8 @@
         </p:nvSpPr>
         <p:spPr>
           <a:xfrm>
-            <a:off x="868680" y="4709160"/>
-            <a:ext cx="10515600" cy="365760"/>
+            <a:off x="822960" y="5120640"/>
+            <a:ext cx="4937760" cy="1005840"/>
           </a:xfrm>
           <a:prstGeom prst="rect">
             <a:avLst/>
@@ -20403,30 +20541,34 @@
                 </a:solidFill>
                 <a:latin typeface="Calibri"/>
               </a:rPr>
-              <a:t>Half your volume creates a new customer at every unboxing — your recipient flow is acquisition disguised as service.</a:t>
-            </a:r>
-          </a:p>
-        </p:txBody>
-      </p:sp>
-      <p:sp>
-        <p:nvSpPr>
-          <p:cNvPr id="15" name="Rectangle 14"/>
+              <a:t>Every customer-facing string of cultural content reviewed by a curator the brand chooses. AI generates; humans approve.</a:t>
+            </a:r>
+          </a:p>
+        </p:txBody>
+      </p:sp>
+      <p:sp>
+        <p:nvSpPr>
+          <p:cNvPr id="15" name="Rounded Rectangle 14"/>
           <p:cNvSpPr/>
           <p:nvPr/>
         </p:nvSpPr>
         <p:spPr>
           <a:xfrm>
-            <a:off x="548640" y="5166360"/>
-            <a:ext cx="73152" cy="868680"/>
-          </a:xfrm>
-          <a:prstGeom prst="rect">
-            <a:avLst/>
+            <a:off x="6172200" y="4251960"/>
+            <a:ext cx="5486400" cy="1828800"/>
+          </a:xfrm>
+          <a:prstGeom prst="roundRect">
+            <a:avLst>
+              <a:gd name="adj" fmla="val 12000"/>
+            </a:avLst>
           </a:prstGeom>
           <a:solidFill>
-            <a:srgbClr val="A02747"/>
+            <a:srgbClr val="FFFFFF"/>
           </a:solidFill>
-          <a:ln>
-            <a:noFill/>
+          <a:ln w="9525">
+            <a:solidFill>
+              <a:srgbClr val="E6D9C0"/>
+            </a:solidFill>
           </a:ln>
           <a:effectLst/>
         </p:spPr>
@@ -20460,8 +20602,8 @@
         </p:nvSpPr>
         <p:spPr>
           <a:xfrm>
-            <a:off x="868680" y="5212080"/>
-            <a:ext cx="10515600" cy="365760"/>
+            <a:off x="6446520" y="4526280"/>
+            <a:ext cx="4937760" cy="457200"/>
           </a:xfrm>
           <a:prstGeom prst="rect">
             <a:avLst/>
@@ -20478,11 +20620,11 @@
             <a:r>
               <a:rPr sz="2000" b="0">
                 <a:solidFill>
-                  <a:srgbClr val="2A1A14"/>
+                  <a:srgbClr val="A02747"/>
                 </a:solidFill>
                 <a:latin typeface="Georgia"/>
               </a:rPr>
-              <a:t>Built to honour, not exploit</a:t>
+              <a:t>Always your data</a:t>
             </a:r>
           </a:p>
         </p:txBody>
@@ -20495,8 +20637,8 @@
         </p:nvSpPr>
         <p:spPr>
           <a:xfrm>
-            <a:off x="868680" y="5669280"/>
-            <a:ext cx="10515600" cy="365760"/>
+            <a:off x="6446520" y="5120640"/>
+            <a:ext cx="4937760" cy="1005840"/>
           </a:xfrm>
           <a:prstGeom prst="rect">
             <a:avLst/>
@@ -20517,7 +20659,7 @@
                 </a:solidFill>
                 <a:latin typeface="Calibri"/>
               </a:rPr>
-              <a:t>AI in service of cultural craft, never replacing it. The brand's reputation grows safer, not riskier, in the building.</a:t>
+              <a:t>Source code, customer data, model logs all live in your accounts. Multi-region storage to honour data-residency rules.</a:t>
             </a:r>
           </a:p>
         </p:txBody>
@@ -20587,7 +20729,7 @@
                 </a:solidFill>
                 <a:latin typeface="Calibri"/>
               </a:rPr>
-              <a:t>21 / 22</a:t>
+              <a:t>21 / 23</a:t>
             </a:r>
           </a:p>
         </p:txBody>
@@ -20656,6 +20798,707 @@
       </p:sp>
       <p:sp>
         <p:nvSpPr>
+          <p:cNvPr id="3" name="TextBox 2"/>
+          <p:cNvSpPr txBox="1"/>
+          <p:nvPr/>
+        </p:nvSpPr>
+        <p:spPr>
+          <a:xfrm>
+            <a:off x="548640" y="502920"/>
+            <a:ext cx="7315200" cy="274320"/>
+          </a:xfrm>
+          <a:prstGeom prst="rect">
+            <a:avLst/>
+          </a:prstGeom>
+          <a:noFill/>
+        </p:spPr>
+        <p:txBody>
+          <a:bodyPr wrap="square" lIns="0" rIns="0" tIns="0" bIns="0" anchor="t">
+            <a:spAutoFit/>
+          </a:bodyPr>
+          <a:lstStyle/>
+          <a:p>
+            <a:pPr algn="l"/>
+            <a:r>
+              <a:rPr sz="1000" b="1">
+                <a:solidFill>
+                  <a:srgbClr val="A02747"/>
+                </a:solidFill>
+                <a:latin typeface="Calibri"/>
+              </a:rPr>
+              <a:t>WHY THIS WORKS FOR PINEDA COVALÍN</a:t>
+            </a:r>
+          </a:p>
+        </p:txBody>
+      </p:sp>
+      <p:sp>
+        <p:nvSpPr>
+          <p:cNvPr id="4" name="TextBox 3"/>
+          <p:cNvSpPr txBox="1"/>
+          <p:nvPr/>
+        </p:nvSpPr>
+        <p:spPr>
+          <a:xfrm>
+            <a:off x="548640" y="777240"/>
+            <a:ext cx="10972800" cy="914400"/>
+          </a:xfrm>
+          <a:prstGeom prst="rect">
+            <a:avLst/>
+          </a:prstGeom>
+          <a:noFill/>
+        </p:spPr>
+        <p:txBody>
+          <a:bodyPr wrap="square" lIns="0" rIns="0" tIns="0" bIns="0" anchor="t">
+            <a:spAutoFit/>
+          </a:bodyPr>
+          <a:lstStyle/>
+          <a:p>
+            <a:pPr algn="l"/>
+            <a:r>
+              <a:rPr sz="3400" b="0">
+                <a:solidFill>
+                  <a:srgbClr val="2A1A14"/>
+                </a:solidFill>
+                <a:latin typeface="Georgia"/>
+              </a:rPr>
+              <a:t>The bet behind the build.</a:t>
+            </a:r>
+          </a:p>
+        </p:txBody>
+      </p:sp>
+      <p:sp>
+        <p:nvSpPr>
+          <p:cNvPr id="5" name="Rectangle 4"/>
+          <p:cNvSpPr/>
+          <p:nvPr/>
+        </p:nvSpPr>
+        <p:spPr>
+          <a:xfrm>
+            <a:off x="548640" y="1691640"/>
+            <a:ext cx="640080" cy="25400"/>
+          </a:xfrm>
+          <a:prstGeom prst="rect">
+            <a:avLst/>
+          </a:prstGeom>
+          <a:solidFill>
+            <a:srgbClr val="A02747"/>
+          </a:solidFill>
+          <a:ln>
+            <a:noFill/>
+          </a:ln>
+        </p:spPr>
+        <p:style>
+          <a:lnRef idx="1">
+            <a:schemeClr val="accent1"/>
+          </a:lnRef>
+          <a:fillRef idx="3">
+            <a:schemeClr val="accent1"/>
+          </a:fillRef>
+          <a:effectRef idx="2">
+            <a:schemeClr val="accent1"/>
+          </a:effectRef>
+          <a:fontRef idx="minor">
+            <a:schemeClr val="lt1"/>
+          </a:fontRef>
+        </p:style>
+        <p:txBody>
+          <a:bodyPr rtlCol="0" anchor="ctr"/>
+          <a:lstStyle/>
+          <a:p>
+            <a:pPr algn="ctr"/>
+          </a:p>
+        </p:txBody>
+      </p:sp>
+      <p:sp>
+        <p:nvSpPr>
+          <p:cNvPr id="6" name="Rectangle 5"/>
+          <p:cNvSpPr/>
+          <p:nvPr/>
+        </p:nvSpPr>
+        <p:spPr>
+          <a:xfrm>
+            <a:off x="548640" y="2286000"/>
+            <a:ext cx="73152" cy="868680"/>
+          </a:xfrm>
+          <a:prstGeom prst="rect">
+            <a:avLst/>
+          </a:prstGeom>
+          <a:solidFill>
+            <a:srgbClr val="A02747"/>
+          </a:solidFill>
+          <a:ln>
+            <a:noFill/>
+          </a:ln>
+          <a:effectLst/>
+        </p:spPr>
+        <p:style>
+          <a:lnRef idx="1">
+            <a:schemeClr val="accent1"/>
+          </a:lnRef>
+          <a:fillRef idx="3">
+            <a:schemeClr val="accent1"/>
+          </a:fillRef>
+          <a:effectRef idx="2">
+            <a:schemeClr val="accent1"/>
+          </a:effectRef>
+          <a:fontRef idx="minor">
+            <a:schemeClr val="lt1"/>
+          </a:fontRef>
+        </p:style>
+        <p:txBody>
+          <a:bodyPr rtlCol="0" anchor="ctr"/>
+          <a:lstStyle/>
+          <a:p>
+            <a:pPr algn="ctr"/>
+          </a:p>
+        </p:txBody>
+      </p:sp>
+      <p:sp>
+        <p:nvSpPr>
+          <p:cNvPr id="7" name="TextBox 6"/>
+          <p:cNvSpPr txBox="1"/>
+          <p:nvPr/>
+        </p:nvSpPr>
+        <p:spPr>
+          <a:xfrm>
+            <a:off x="868680" y="2331720"/>
+            <a:ext cx="10515600" cy="365760"/>
+          </a:xfrm>
+          <a:prstGeom prst="rect">
+            <a:avLst/>
+          </a:prstGeom>
+          <a:noFill/>
+        </p:spPr>
+        <p:txBody>
+          <a:bodyPr wrap="square" lIns="0" rIns="0" tIns="0" bIns="0" anchor="t">
+            <a:spAutoFit/>
+          </a:bodyPr>
+          <a:lstStyle/>
+          <a:p>
+            <a:pPr algn="l"/>
+            <a:r>
+              <a:rPr sz="2000" b="0">
+                <a:solidFill>
+                  <a:srgbClr val="2A1A14"/>
+                </a:solidFill>
+                <a:latin typeface="Georgia"/>
+              </a:rPr>
+              <a:t>Your story is your moat</a:t>
+            </a:r>
+          </a:p>
+        </p:txBody>
+      </p:sp>
+      <p:sp>
+        <p:nvSpPr>
+          <p:cNvPr id="8" name="TextBox 7"/>
+          <p:cNvSpPr txBox="1"/>
+          <p:nvPr/>
+        </p:nvSpPr>
+        <p:spPr>
+          <a:xfrm>
+            <a:off x="868680" y="2788920"/>
+            <a:ext cx="10515600" cy="365760"/>
+          </a:xfrm>
+          <a:prstGeom prst="rect">
+            <a:avLst/>
+          </a:prstGeom>
+          <a:noFill/>
+        </p:spPr>
+        <p:txBody>
+          <a:bodyPr wrap="square" lIns="0" rIns="0" tIns="0" bIns="0" anchor="t">
+            <a:spAutoFit/>
+          </a:bodyPr>
+          <a:lstStyle/>
+          <a:p>
+            <a:pPr algn="l"/>
+            <a:r>
+              <a:rPr sz="1200" b="0">
+                <a:solidFill>
+                  <a:srgbClr val="8A7866"/>
+                </a:solidFill>
+                <a:latin typeface="Calibri"/>
+              </a:rPr>
+              <a:t>No global luxury house can claim authentic Mexican cultural craft. The Atelier passport puts that authority in the customer's hand, in their language.</a:t>
+            </a:r>
+          </a:p>
+        </p:txBody>
+      </p:sp>
+      <p:sp>
+        <p:nvSpPr>
+          <p:cNvPr id="9" name="Rectangle 8"/>
+          <p:cNvSpPr/>
+          <p:nvPr/>
+        </p:nvSpPr>
+        <p:spPr>
+          <a:xfrm>
+            <a:off x="548640" y="3246120"/>
+            <a:ext cx="73152" cy="868680"/>
+          </a:xfrm>
+          <a:prstGeom prst="rect">
+            <a:avLst/>
+          </a:prstGeom>
+          <a:solidFill>
+            <a:srgbClr val="A02747"/>
+          </a:solidFill>
+          <a:ln>
+            <a:noFill/>
+          </a:ln>
+          <a:effectLst/>
+        </p:spPr>
+        <p:style>
+          <a:lnRef idx="1">
+            <a:schemeClr val="accent1"/>
+          </a:lnRef>
+          <a:fillRef idx="3">
+            <a:schemeClr val="accent1"/>
+          </a:fillRef>
+          <a:effectRef idx="2">
+            <a:schemeClr val="accent1"/>
+          </a:effectRef>
+          <a:fontRef idx="minor">
+            <a:schemeClr val="lt1"/>
+          </a:fontRef>
+        </p:style>
+        <p:txBody>
+          <a:bodyPr rtlCol="0" anchor="ctr"/>
+          <a:lstStyle/>
+          <a:p>
+            <a:pPr algn="ctr"/>
+          </a:p>
+        </p:txBody>
+      </p:sp>
+      <p:sp>
+        <p:nvSpPr>
+          <p:cNvPr id="10" name="TextBox 9"/>
+          <p:cNvSpPr txBox="1"/>
+          <p:nvPr/>
+        </p:nvSpPr>
+        <p:spPr>
+          <a:xfrm>
+            <a:off x="868680" y="3291840"/>
+            <a:ext cx="10515600" cy="365760"/>
+          </a:xfrm>
+          <a:prstGeom prst="rect">
+            <a:avLst/>
+          </a:prstGeom>
+          <a:noFill/>
+        </p:spPr>
+        <p:txBody>
+          <a:bodyPr wrap="square" lIns="0" rIns="0" tIns="0" bIns="0" anchor="t">
+            <a:spAutoFit/>
+          </a:bodyPr>
+          <a:lstStyle/>
+          <a:p>
+            <a:pPr algn="l"/>
+            <a:r>
+              <a:rPr sz="2000" b="0">
+                <a:solidFill>
+                  <a:srgbClr val="2A1A14"/>
+                </a:solidFill>
+                <a:latin typeface="Georgia"/>
+              </a:rPr>
+              <a:t>The tourist is your hidden customer</a:t>
+            </a:r>
+          </a:p>
+        </p:txBody>
+      </p:sp>
+      <p:sp>
+        <p:nvSpPr>
+          <p:cNvPr id="11" name="TextBox 10"/>
+          <p:cNvSpPr txBox="1"/>
+          <p:nvPr/>
+        </p:nvSpPr>
+        <p:spPr>
+          <a:xfrm>
+            <a:off x="868680" y="3749040"/>
+            <a:ext cx="10515600" cy="365760"/>
+          </a:xfrm>
+          <a:prstGeom prst="rect">
+            <a:avLst/>
+          </a:prstGeom>
+          <a:noFill/>
+        </p:spPr>
+        <p:txBody>
+          <a:bodyPr wrap="square" lIns="0" rIns="0" tIns="0" bIns="0" anchor="t">
+            <a:spAutoFit/>
+          </a:bodyPr>
+          <a:lstStyle/>
+          <a:p>
+            <a:pPr algn="l"/>
+            <a:r>
+              <a:rPr sz="1200" b="0">
+                <a:solidFill>
+                  <a:srgbClr val="8A7866"/>
+                </a:solidFill>
+                <a:latin typeface="Calibri"/>
+              </a:rPr>
+              <a:t>40% of your sales walk away never to return. The app makes them collectors. Even a 10% retention shift is the largest growth lever you have.</a:t>
+            </a:r>
+          </a:p>
+        </p:txBody>
+      </p:sp>
+      <p:sp>
+        <p:nvSpPr>
+          <p:cNvPr id="12" name="Rectangle 11"/>
+          <p:cNvSpPr/>
+          <p:nvPr/>
+        </p:nvSpPr>
+        <p:spPr>
+          <a:xfrm>
+            <a:off x="548640" y="4206240"/>
+            <a:ext cx="73152" cy="868680"/>
+          </a:xfrm>
+          <a:prstGeom prst="rect">
+            <a:avLst/>
+          </a:prstGeom>
+          <a:solidFill>
+            <a:srgbClr val="A02747"/>
+          </a:solidFill>
+          <a:ln>
+            <a:noFill/>
+          </a:ln>
+          <a:effectLst/>
+        </p:spPr>
+        <p:style>
+          <a:lnRef idx="1">
+            <a:schemeClr val="accent1"/>
+          </a:lnRef>
+          <a:fillRef idx="3">
+            <a:schemeClr val="accent1"/>
+          </a:fillRef>
+          <a:effectRef idx="2">
+            <a:schemeClr val="accent1"/>
+          </a:effectRef>
+          <a:fontRef idx="minor">
+            <a:schemeClr val="lt1"/>
+          </a:fontRef>
+        </p:style>
+        <p:txBody>
+          <a:bodyPr rtlCol="0" anchor="ctr"/>
+          <a:lstStyle/>
+          <a:p>
+            <a:pPr algn="ctr"/>
+          </a:p>
+        </p:txBody>
+      </p:sp>
+      <p:sp>
+        <p:nvSpPr>
+          <p:cNvPr id="13" name="TextBox 12"/>
+          <p:cNvSpPr txBox="1"/>
+          <p:nvPr/>
+        </p:nvSpPr>
+        <p:spPr>
+          <a:xfrm>
+            <a:off x="868680" y="4251960"/>
+            <a:ext cx="10515600" cy="365760"/>
+          </a:xfrm>
+          <a:prstGeom prst="rect">
+            <a:avLst/>
+          </a:prstGeom>
+          <a:noFill/>
+        </p:spPr>
+        <p:txBody>
+          <a:bodyPr wrap="square" lIns="0" rIns="0" tIns="0" bIns="0" anchor="t">
+            <a:spAutoFit/>
+          </a:bodyPr>
+          <a:lstStyle/>
+          <a:p>
+            <a:pPr algn="l"/>
+            <a:r>
+              <a:rPr sz="2000" b="0">
+                <a:solidFill>
+                  <a:srgbClr val="2A1A14"/>
+                </a:solidFill>
+                <a:latin typeface="Georgia"/>
+              </a:rPr>
+              <a:t>The gift is a Trojan horse</a:t>
+            </a:r>
+          </a:p>
+        </p:txBody>
+      </p:sp>
+      <p:sp>
+        <p:nvSpPr>
+          <p:cNvPr id="14" name="TextBox 13"/>
+          <p:cNvSpPr txBox="1"/>
+          <p:nvPr/>
+        </p:nvSpPr>
+        <p:spPr>
+          <a:xfrm>
+            <a:off x="868680" y="4709160"/>
+            <a:ext cx="10515600" cy="365760"/>
+          </a:xfrm>
+          <a:prstGeom prst="rect">
+            <a:avLst/>
+          </a:prstGeom>
+          <a:noFill/>
+        </p:spPr>
+        <p:txBody>
+          <a:bodyPr wrap="square" lIns="0" rIns="0" tIns="0" bIns="0" anchor="t">
+            <a:spAutoFit/>
+          </a:bodyPr>
+          <a:lstStyle/>
+          <a:p>
+            <a:pPr algn="l"/>
+            <a:r>
+              <a:rPr sz="1200" b="0">
+                <a:solidFill>
+                  <a:srgbClr val="8A7866"/>
+                </a:solidFill>
+                <a:latin typeface="Calibri"/>
+              </a:rPr>
+              <a:t>Half your volume creates a new customer at every unboxing — your recipient flow is acquisition disguised as service.</a:t>
+            </a:r>
+          </a:p>
+        </p:txBody>
+      </p:sp>
+      <p:sp>
+        <p:nvSpPr>
+          <p:cNvPr id="15" name="Rectangle 14"/>
+          <p:cNvSpPr/>
+          <p:nvPr/>
+        </p:nvSpPr>
+        <p:spPr>
+          <a:xfrm>
+            <a:off x="548640" y="5166360"/>
+            <a:ext cx="73152" cy="868680"/>
+          </a:xfrm>
+          <a:prstGeom prst="rect">
+            <a:avLst/>
+          </a:prstGeom>
+          <a:solidFill>
+            <a:srgbClr val="A02747"/>
+          </a:solidFill>
+          <a:ln>
+            <a:noFill/>
+          </a:ln>
+          <a:effectLst/>
+        </p:spPr>
+        <p:style>
+          <a:lnRef idx="1">
+            <a:schemeClr val="accent1"/>
+          </a:lnRef>
+          <a:fillRef idx="3">
+            <a:schemeClr val="accent1"/>
+          </a:fillRef>
+          <a:effectRef idx="2">
+            <a:schemeClr val="accent1"/>
+          </a:effectRef>
+          <a:fontRef idx="minor">
+            <a:schemeClr val="lt1"/>
+          </a:fontRef>
+        </p:style>
+        <p:txBody>
+          <a:bodyPr rtlCol="0" anchor="ctr"/>
+          <a:lstStyle/>
+          <a:p>
+            <a:pPr algn="ctr"/>
+          </a:p>
+        </p:txBody>
+      </p:sp>
+      <p:sp>
+        <p:nvSpPr>
+          <p:cNvPr id="16" name="TextBox 15"/>
+          <p:cNvSpPr txBox="1"/>
+          <p:nvPr/>
+        </p:nvSpPr>
+        <p:spPr>
+          <a:xfrm>
+            <a:off x="868680" y="5212080"/>
+            <a:ext cx="10515600" cy="365760"/>
+          </a:xfrm>
+          <a:prstGeom prst="rect">
+            <a:avLst/>
+          </a:prstGeom>
+          <a:noFill/>
+        </p:spPr>
+        <p:txBody>
+          <a:bodyPr wrap="square" lIns="0" rIns="0" tIns="0" bIns="0" anchor="t">
+            <a:spAutoFit/>
+          </a:bodyPr>
+          <a:lstStyle/>
+          <a:p>
+            <a:pPr algn="l"/>
+            <a:r>
+              <a:rPr sz="2000" b="0">
+                <a:solidFill>
+                  <a:srgbClr val="2A1A14"/>
+                </a:solidFill>
+                <a:latin typeface="Georgia"/>
+              </a:rPr>
+              <a:t>Built to honour, not exploit</a:t>
+            </a:r>
+          </a:p>
+        </p:txBody>
+      </p:sp>
+      <p:sp>
+        <p:nvSpPr>
+          <p:cNvPr id="17" name="TextBox 16"/>
+          <p:cNvSpPr txBox="1"/>
+          <p:nvPr/>
+        </p:nvSpPr>
+        <p:spPr>
+          <a:xfrm>
+            <a:off x="868680" y="5669280"/>
+            <a:ext cx="10515600" cy="365760"/>
+          </a:xfrm>
+          <a:prstGeom prst="rect">
+            <a:avLst/>
+          </a:prstGeom>
+          <a:noFill/>
+        </p:spPr>
+        <p:txBody>
+          <a:bodyPr wrap="square" lIns="0" rIns="0" tIns="0" bIns="0" anchor="t">
+            <a:spAutoFit/>
+          </a:bodyPr>
+          <a:lstStyle/>
+          <a:p>
+            <a:pPr algn="l"/>
+            <a:r>
+              <a:rPr sz="1200" b="0">
+                <a:solidFill>
+                  <a:srgbClr val="8A7866"/>
+                </a:solidFill>
+                <a:latin typeface="Calibri"/>
+              </a:rPr>
+              <a:t>AI in service of cultural craft, never replacing it. The brand's reputation grows safer, not riskier, in the building.</a:t>
+            </a:r>
+          </a:p>
+        </p:txBody>
+      </p:sp>
+      <p:sp>
+        <p:nvSpPr>
+          <p:cNvPr id="18" name="TextBox 17"/>
+          <p:cNvSpPr txBox="1"/>
+          <p:nvPr/>
+        </p:nvSpPr>
+        <p:spPr>
+          <a:xfrm>
+            <a:off x="548640" y="6446520"/>
+            <a:ext cx="5486400" cy="274320"/>
+          </a:xfrm>
+          <a:prstGeom prst="rect">
+            <a:avLst/>
+          </a:prstGeom>
+          <a:noFill/>
+        </p:spPr>
+        <p:txBody>
+          <a:bodyPr wrap="square" lIns="0" rIns="0" tIns="0" bIns="0" anchor="t">
+            <a:spAutoFit/>
+          </a:bodyPr>
+          <a:lstStyle/>
+          <a:p>
+            <a:pPr algn="l"/>
+            <a:r>
+              <a:rPr sz="900" b="0">
+                <a:solidFill>
+                  <a:srgbClr val="8A7866"/>
+                </a:solidFill>
+                <a:latin typeface="Calibri"/>
+              </a:rPr>
+              <a:t>Pineda Covalín · Mobile App Pitch</a:t>
+            </a:r>
+          </a:p>
+        </p:txBody>
+      </p:sp>
+      <p:sp>
+        <p:nvSpPr>
+          <p:cNvPr id="19" name="TextBox 18"/>
+          <p:cNvSpPr txBox="1"/>
+          <p:nvPr/>
+        </p:nvSpPr>
+        <p:spPr>
+          <a:xfrm>
+            <a:off x="10698480" y="6446520"/>
+            <a:ext cx="914400" cy="274320"/>
+          </a:xfrm>
+          <a:prstGeom prst="rect">
+            <a:avLst/>
+          </a:prstGeom>
+          <a:noFill/>
+        </p:spPr>
+        <p:txBody>
+          <a:bodyPr wrap="square" lIns="0" rIns="0" tIns="0" bIns="0" anchor="t">
+            <a:spAutoFit/>
+          </a:bodyPr>
+          <a:lstStyle/>
+          <a:p>
+            <a:pPr algn="r"/>
+            <a:r>
+              <a:rPr sz="900" b="0">
+                <a:solidFill>
+                  <a:srgbClr val="8A7866"/>
+                </a:solidFill>
+                <a:latin typeface="Calibri"/>
+              </a:rPr>
+              <a:t>22 / 23</a:t>
+            </a:r>
+          </a:p>
+        </p:txBody>
+      </p:sp>
+    </p:spTree>
+  </p:cSld>
+  <p:clrMapOvr>
+    <a:masterClrMapping/>
+  </p:clrMapOvr>
+</p:sld>
+</file>
+
+<file path=ppt/slides/slide23.xml><?xml version="1.0" encoding="utf-8"?>
+<p:sld xmlns:a="http://schemas.openxmlformats.org/drawingml/2006/main" xmlns:p="http://schemas.openxmlformats.org/presentationml/2006/main" xmlns:r="http://schemas.openxmlformats.org/officeDocument/2006/relationships">
+  <p:cSld>
+    <p:spTree>
+      <p:nvGrpSpPr>
+        <p:cNvPr id="1" name=""/>
+        <p:cNvGrpSpPr/>
+        <p:nvPr/>
+      </p:nvGrpSpPr>
+      <p:grpSpPr/>
+      <p:sp>
+        <p:nvSpPr>
+          <p:cNvPr id="2" name="Rectangle 1"/>
+          <p:cNvSpPr/>
+          <p:nvPr/>
+        </p:nvSpPr>
+        <p:spPr>
+          <a:xfrm>
+            <a:off x="0" y="0"/>
+            <a:ext cx="12191695" cy="6858000"/>
+          </a:xfrm>
+          <a:prstGeom prst="rect">
+            <a:avLst/>
+          </a:prstGeom>
+          <a:solidFill>
+            <a:srgbClr val="F5EDE0"/>
+          </a:solidFill>
+          <a:ln>
+            <a:noFill/>
+          </a:ln>
+          <a:effectLst/>
+        </p:spPr>
+        <p:style>
+          <a:lnRef idx="1">
+            <a:schemeClr val="accent1"/>
+          </a:lnRef>
+          <a:fillRef idx="3">
+            <a:schemeClr val="accent1"/>
+          </a:fillRef>
+          <a:effectRef idx="2">
+            <a:schemeClr val="accent1"/>
+          </a:effectRef>
+          <a:fontRef idx="minor">
+            <a:schemeClr val="lt1"/>
+          </a:fontRef>
+        </p:style>
+        <p:txBody>
+          <a:bodyPr rtlCol="0" anchor="ctr"/>
+          <a:lstStyle/>
+          <a:p>
+            <a:pPr algn="ctr"/>
+          </a:p>
+        </p:txBody>
+      </p:sp>
+      <p:sp>
+        <p:nvSpPr>
           <p:cNvPr id="3" name="Rectangle 2"/>
           <p:cNvSpPr/>
           <p:nvPr/>
@@ -21238,7 +22081,7 @@
                 </a:solidFill>
                 <a:latin typeface="Calibri"/>
               </a:rPr>
-              <a:t>22 / 22</a:t>
+              <a:t>23 / 23</a:t>
             </a:r>
           </a:p>
         </p:txBody>
@@ -21636,7 +22479,7 @@
                 </a:solidFill>
                 <a:latin typeface="Calibri"/>
               </a:rPr>
-              <a:t>3 / 22</a:t>
+              <a:t>3 / 23</a:t>
             </a:r>
           </a:p>
         </p:txBody>
@@ -21768,7 +22611,7 @@
                 </a:solidFill>
                 <a:latin typeface="Georgia"/>
               </a:rPr>
-              <a:t>Five pillars.</a:t>
+              <a:t>Six pillars — five customer-facing, one internal.</a:t>
             </a:r>
           </a:p>
         </p:txBody>
@@ -21824,8 +22667,8 @@
         </p:nvSpPr>
         <p:spPr>
           <a:xfrm>
-            <a:off x="548640" y="2103120"/>
-            <a:ext cx="2194560" cy="4206240"/>
+            <a:off x="548640" y="2194560"/>
+            <a:ext cx="3657600" cy="2057400"/>
           </a:xfrm>
           <a:prstGeom prst="roundRect">
             <a:avLst>
@@ -21872,8 +22715,8 @@
         </p:nvSpPr>
         <p:spPr>
           <a:xfrm>
-            <a:off x="548640" y="2103120"/>
-            <a:ext cx="2194560" cy="457200"/>
+            <a:off x="548640" y="2194560"/>
+            <a:ext cx="91440" cy="2057400"/>
           </a:xfrm>
           <a:prstGeom prst="roundRect">
             <a:avLst>
@@ -21918,23 +22761,23 @@
         </p:nvSpPr>
         <p:spPr>
           <a:xfrm>
-            <a:off x="822960" y="2606040"/>
-            <a:ext cx="1645920" cy="457200"/>
-          </a:xfrm>
-          <a:prstGeom prst="rect">
-            <a:avLst/>
-          </a:prstGeom>
-          <a:noFill/>
-        </p:spPr>
-        <p:txBody>
-          <a:bodyPr wrap="square" lIns="0" rIns="0" tIns="0" bIns="0" anchor="t">
-            <a:spAutoFit/>
-          </a:bodyPr>
-          <a:lstStyle/>
-          <a:p>
-            <a:pPr algn="l"/>
-            <a:r>
-              <a:rPr sz="2200" b="1">
+            <a:off x="822960" y="2377440"/>
+            <a:ext cx="3108960" cy="365760"/>
+          </a:xfrm>
+          <a:prstGeom prst="rect">
+            <a:avLst/>
+          </a:prstGeom>
+          <a:noFill/>
+        </p:spPr>
+        <p:txBody>
+          <a:bodyPr wrap="square" lIns="0" rIns="0" tIns="0" bIns="0" anchor="t">
+            <a:spAutoFit/>
+          </a:bodyPr>
+          <a:lstStyle/>
+          <a:p>
+            <a:pPr algn="l"/>
+            <a:r>
+              <a:rPr sz="2000" b="1">
                 <a:solidFill>
                   <a:srgbClr val="D89B3D"/>
                 </a:solidFill>
@@ -21953,23 +22796,23 @@
         </p:nvSpPr>
         <p:spPr>
           <a:xfrm>
-            <a:off x="822960" y="3154680"/>
-            <a:ext cx="1645920" cy="548640"/>
-          </a:xfrm>
-          <a:prstGeom prst="rect">
-            <a:avLst/>
-          </a:prstGeom>
-          <a:noFill/>
-        </p:spPr>
-        <p:txBody>
-          <a:bodyPr wrap="square" lIns="0" rIns="0" tIns="0" bIns="0" anchor="t">
-            <a:spAutoFit/>
-          </a:bodyPr>
-          <a:lstStyle/>
-          <a:p>
-            <a:pPr algn="l"/>
-            <a:r>
-              <a:rPr sz="1800" b="0">
+            <a:off x="822960" y="2834640"/>
+            <a:ext cx="3108960" cy="457200"/>
+          </a:xfrm>
+          <a:prstGeom prst="rect">
+            <a:avLst/>
+          </a:prstGeom>
+          <a:noFill/>
+        </p:spPr>
+        <p:txBody>
+          <a:bodyPr wrap="square" lIns="0" rIns="0" tIns="0" bIns="0" anchor="t">
+            <a:spAutoFit/>
+          </a:bodyPr>
+          <a:lstStyle/>
+          <a:p>
+            <a:pPr algn="l"/>
+            <a:r>
+              <a:rPr sz="2000" b="0">
                 <a:solidFill>
                   <a:srgbClr val="2A1A14"/>
                 </a:solidFill>
@@ -21988,8 +22831,8 @@
         </p:nvSpPr>
         <p:spPr>
           <a:xfrm>
-            <a:off x="822960" y="3794760"/>
-            <a:ext cx="1645920" cy="2286000"/>
+            <a:off x="822960" y="3337560"/>
+            <a:ext cx="3108960" cy="914400"/>
           </a:xfrm>
           <a:prstGeom prst="rect">
             <a:avLst/>
@@ -22010,7 +22853,7 @@
                 </a:solidFill>
                 <a:latin typeface="Calibri"/>
               </a:rPr>
-              <a:t>Each piece carries its passport — motif meaning, technique, artist, audio guide.</a:t>
+              <a:t>Each piece carries its passport — motif, technique, artist, audio guide.</a:t>
             </a:r>
           </a:p>
         </p:txBody>
@@ -22023,8 +22866,8 @@
         </p:nvSpPr>
         <p:spPr>
           <a:xfrm>
-            <a:off x="2834640" y="2103120"/>
-            <a:ext cx="2194560" cy="4206240"/>
+            <a:off x="4343400" y="2194560"/>
+            <a:ext cx="3657600" cy="2057400"/>
           </a:xfrm>
           <a:prstGeom prst="roundRect">
             <a:avLst>
@@ -22071,8 +22914,8 @@
         </p:nvSpPr>
         <p:spPr>
           <a:xfrm>
-            <a:off x="2834640" y="2103120"/>
-            <a:ext cx="2194560" cy="457200"/>
+            <a:off x="4343400" y="2194560"/>
+            <a:ext cx="91440" cy="2057400"/>
           </a:xfrm>
           <a:prstGeom prst="roundRect">
             <a:avLst>
@@ -22117,23 +22960,23 @@
         </p:nvSpPr>
         <p:spPr>
           <a:xfrm>
-            <a:off x="3108960" y="2606040"/>
-            <a:ext cx="1645920" cy="457200"/>
-          </a:xfrm>
-          <a:prstGeom prst="rect">
-            <a:avLst/>
-          </a:prstGeom>
-          <a:noFill/>
-        </p:spPr>
-        <p:txBody>
-          <a:bodyPr wrap="square" lIns="0" rIns="0" tIns="0" bIns="0" anchor="t">
-            <a:spAutoFit/>
-          </a:bodyPr>
-          <a:lstStyle/>
-          <a:p>
-            <a:pPr algn="l"/>
-            <a:r>
-              <a:rPr sz="2200" b="1">
+            <a:off x="4617720" y="2377440"/>
+            <a:ext cx="3108960" cy="365760"/>
+          </a:xfrm>
+          <a:prstGeom prst="rect">
+            <a:avLst/>
+          </a:prstGeom>
+          <a:noFill/>
+        </p:spPr>
+        <p:txBody>
+          <a:bodyPr wrap="square" lIns="0" rIns="0" tIns="0" bIns="0" anchor="t">
+            <a:spAutoFit/>
+          </a:bodyPr>
+          <a:lstStyle/>
+          <a:p>
+            <a:pPr algn="l"/>
+            <a:r>
+              <a:rPr sz="2000" b="1">
                 <a:solidFill>
                   <a:srgbClr val="A02747"/>
                 </a:solidFill>
@@ -22152,23 +22995,23 @@
         </p:nvSpPr>
         <p:spPr>
           <a:xfrm>
-            <a:off x="3108960" y="3154680"/>
-            <a:ext cx="1645920" cy="548640"/>
-          </a:xfrm>
-          <a:prstGeom prst="rect">
-            <a:avLst/>
-          </a:prstGeom>
-          <a:noFill/>
-        </p:spPr>
-        <p:txBody>
-          <a:bodyPr wrap="square" lIns="0" rIns="0" tIns="0" bIns="0" anchor="t">
-            <a:spAutoFit/>
-          </a:bodyPr>
-          <a:lstStyle/>
-          <a:p>
-            <a:pPr algn="l"/>
-            <a:r>
-              <a:rPr sz="1800" b="0">
+            <a:off x="4617720" y="2834640"/>
+            <a:ext cx="3108960" cy="457200"/>
+          </a:xfrm>
+          <a:prstGeom prst="rect">
+            <a:avLst/>
+          </a:prstGeom>
+          <a:noFill/>
+        </p:spPr>
+        <p:txBody>
+          <a:bodyPr wrap="square" lIns="0" rIns="0" tIns="0" bIns="0" anchor="t">
+            <a:spAutoFit/>
+          </a:bodyPr>
+          <a:lstStyle/>
+          <a:p>
+            <a:pPr algn="l"/>
+            <a:r>
+              <a:rPr sz="2000" b="0">
                 <a:solidFill>
                   <a:srgbClr val="2A1A14"/>
                 </a:solidFill>
@@ -22187,8 +23030,8 @@
         </p:nvSpPr>
         <p:spPr>
           <a:xfrm>
-            <a:off x="3108960" y="3794760"/>
-            <a:ext cx="1645920" cy="2286000"/>
+            <a:off x="4617720" y="3337560"/>
+            <a:ext cx="3108960" cy="914400"/>
           </a:xfrm>
           <a:prstGeom prst="rect">
             <a:avLst/>
@@ -22209,7 +23052,7 @@
                 </a:solidFill>
                 <a:latin typeface="Calibri"/>
               </a:rPr>
-              <a:t>A luxury shop curated by collection — Huichol, Frida, Monarcas, Día de Muertos, Codices.</a:t>
+              <a:t>Luxury shop curated by collection — Huichol, Frida, Monarcas, Día de Muertos, Codices.</a:t>
             </a:r>
           </a:p>
         </p:txBody>
@@ -22222,8 +23065,8 @@
         </p:nvSpPr>
         <p:spPr>
           <a:xfrm>
-            <a:off x="5120640" y="2103120"/>
-            <a:ext cx="2194560" cy="4206240"/>
+            <a:off x="8138160" y="2194560"/>
+            <a:ext cx="3657600" cy="2057400"/>
           </a:xfrm>
           <a:prstGeom prst="roundRect">
             <a:avLst>
@@ -22270,8 +23113,8 @@
         </p:nvSpPr>
         <p:spPr>
           <a:xfrm>
-            <a:off x="5120640" y="2103120"/>
-            <a:ext cx="2194560" cy="457200"/>
+            <a:off x="8138160" y="2194560"/>
+            <a:ext cx="91440" cy="2057400"/>
           </a:xfrm>
           <a:prstGeom prst="roundRect">
             <a:avLst>
@@ -22316,23 +23159,23 @@
         </p:nvSpPr>
         <p:spPr>
           <a:xfrm>
-            <a:off x="5394960" y="2606040"/>
-            <a:ext cx="1645920" cy="457200"/>
-          </a:xfrm>
-          <a:prstGeom prst="rect">
-            <a:avLst/>
-          </a:prstGeom>
-          <a:noFill/>
-        </p:spPr>
-        <p:txBody>
-          <a:bodyPr wrap="square" lIns="0" rIns="0" tIns="0" bIns="0" anchor="t">
-            <a:spAutoFit/>
-          </a:bodyPr>
-          <a:lstStyle/>
-          <a:p>
-            <a:pPr algn="l"/>
-            <a:r>
-              <a:rPr sz="2200" b="1">
+            <a:off x="8412480" y="2377440"/>
+            <a:ext cx="3108960" cy="365760"/>
+          </a:xfrm>
+          <a:prstGeom prst="rect">
+            <a:avLst/>
+          </a:prstGeom>
+          <a:noFill/>
+        </p:spPr>
+        <p:txBody>
+          <a:bodyPr wrap="square" lIns="0" rIns="0" tIns="0" bIns="0" anchor="t">
+            <a:spAutoFit/>
+          </a:bodyPr>
+          <a:lstStyle/>
+          <a:p>
+            <a:pPr algn="l"/>
+            <a:r>
+              <a:rPr sz="2000" b="1">
                 <a:solidFill>
                   <a:srgbClr val="5B2A52"/>
                 </a:solidFill>
@@ -22351,23 +23194,23 @@
         </p:nvSpPr>
         <p:spPr>
           <a:xfrm>
-            <a:off x="5394960" y="3154680"/>
-            <a:ext cx="1645920" cy="548640"/>
-          </a:xfrm>
-          <a:prstGeom prst="rect">
-            <a:avLst/>
-          </a:prstGeom>
-          <a:noFill/>
-        </p:spPr>
-        <p:txBody>
-          <a:bodyPr wrap="square" lIns="0" rIns="0" tIns="0" bIns="0" anchor="t">
-            <a:spAutoFit/>
-          </a:bodyPr>
-          <a:lstStyle/>
-          <a:p>
-            <a:pPr algn="l"/>
-            <a:r>
-              <a:rPr sz="1800" b="0">
+            <a:off x="8412480" y="2834640"/>
+            <a:ext cx="3108960" cy="457200"/>
+          </a:xfrm>
+          <a:prstGeom prst="rect">
+            <a:avLst/>
+          </a:prstGeom>
+          <a:noFill/>
+        </p:spPr>
+        <p:txBody>
+          <a:bodyPr wrap="square" lIns="0" rIns="0" tIns="0" bIns="0" anchor="t">
+            <a:spAutoFit/>
+          </a:bodyPr>
+          <a:lstStyle/>
+          <a:p>
+            <a:pPr algn="l"/>
+            <a:r>
+              <a:rPr sz="2000" b="0">
                 <a:solidFill>
                   <a:srgbClr val="2A1A14"/>
                 </a:solidFill>
@@ -22386,8 +23229,8 @@
         </p:nvSpPr>
         <p:spPr>
           <a:xfrm>
-            <a:off x="5394960" y="3794760"/>
-            <a:ext cx="1645920" cy="2286000"/>
+            <a:off x="8412480" y="3337560"/>
+            <a:ext cx="3108960" cy="914400"/>
           </a:xfrm>
           <a:prstGeom prst="rect">
             <a:avLst/>
@@ -22408,7 +23251,7 @@
                 </a:solidFill>
                 <a:latin typeface="Calibri"/>
               </a:rPr>
-              <a:t>Wrapping, video message, scheduled unboxing — the gift becomes a cinematic moment.</a:t>
+              <a:t>Wrapping, video message, scheduled unboxing — gifting as cinema.</a:t>
             </a:r>
           </a:p>
         </p:txBody>
@@ -22421,8 +23264,8 @@
         </p:nvSpPr>
         <p:spPr>
           <a:xfrm>
-            <a:off x="7406640" y="2103120"/>
-            <a:ext cx="2194560" cy="4206240"/>
+            <a:off x="548640" y="4416552"/>
+            <a:ext cx="3657600" cy="2057400"/>
           </a:xfrm>
           <a:prstGeom prst="roundRect">
             <a:avLst>
@@ -22469,8 +23312,8 @@
         </p:nvSpPr>
         <p:spPr>
           <a:xfrm>
-            <a:off x="7406640" y="2103120"/>
-            <a:ext cx="2194560" cy="457200"/>
+            <a:off x="548640" y="4416552"/>
+            <a:ext cx="91440" cy="2057400"/>
           </a:xfrm>
           <a:prstGeom prst="roundRect">
             <a:avLst>
@@ -22515,23 +23358,23 @@
         </p:nvSpPr>
         <p:spPr>
           <a:xfrm>
-            <a:off x="7680960" y="2606040"/>
-            <a:ext cx="1645920" cy="457200"/>
-          </a:xfrm>
-          <a:prstGeom prst="rect">
-            <a:avLst/>
-          </a:prstGeom>
-          <a:noFill/>
-        </p:spPr>
-        <p:txBody>
-          <a:bodyPr wrap="square" lIns="0" rIns="0" tIns="0" bIns="0" anchor="t">
-            <a:spAutoFit/>
-          </a:bodyPr>
-          <a:lstStyle/>
-          <a:p>
-            <a:pPr algn="l"/>
-            <a:r>
-              <a:rPr sz="2200" b="1">
+            <a:off x="822960" y="4599432"/>
+            <a:ext cx="3108960" cy="365760"/>
+          </a:xfrm>
+          <a:prstGeom prst="rect">
+            <a:avLst/>
+          </a:prstGeom>
+          <a:noFill/>
+        </p:spPr>
+        <p:txBody>
+          <a:bodyPr wrap="square" lIns="0" rIns="0" tIns="0" bIns="0" anchor="t">
+            <a:spAutoFit/>
+          </a:bodyPr>
+          <a:lstStyle/>
+          <a:p>
+            <a:pPr algn="l"/>
+            <a:r>
+              <a:rPr sz="2000" b="1">
                 <a:solidFill>
                   <a:srgbClr val="2C6E6B"/>
                 </a:solidFill>
@@ -22550,23 +23393,23 @@
         </p:nvSpPr>
         <p:spPr>
           <a:xfrm>
-            <a:off x="7680960" y="3154680"/>
-            <a:ext cx="1645920" cy="548640"/>
-          </a:xfrm>
-          <a:prstGeom prst="rect">
-            <a:avLst/>
-          </a:prstGeom>
-          <a:noFill/>
-        </p:spPr>
-        <p:txBody>
-          <a:bodyPr wrap="square" lIns="0" rIns="0" tIns="0" bIns="0" anchor="t">
-            <a:spAutoFit/>
-          </a:bodyPr>
-          <a:lstStyle/>
-          <a:p>
-            <a:pPr algn="l"/>
-            <a:r>
-              <a:rPr sz="1800" b="0">
+            <a:off x="822960" y="5056632"/>
+            <a:ext cx="3108960" cy="457200"/>
+          </a:xfrm>
+          <a:prstGeom prst="rect">
+            <a:avLst/>
+          </a:prstGeom>
+          <a:noFill/>
+        </p:spPr>
+        <p:txBody>
+          <a:bodyPr wrap="square" lIns="0" rIns="0" tIns="0" bIns="0" anchor="t">
+            <a:spAutoFit/>
+          </a:bodyPr>
+          <a:lstStyle/>
+          <a:p>
+            <a:pPr algn="l"/>
+            <a:r>
+              <a:rPr sz="2000" b="0">
                 <a:solidFill>
                   <a:srgbClr val="2A1A14"/>
                 </a:solidFill>
@@ -22585,8 +23428,8 @@
         </p:nvSpPr>
         <p:spPr>
           <a:xfrm>
-            <a:off x="7680960" y="3794760"/>
-            <a:ext cx="1645920" cy="2286000"/>
+            <a:off x="822960" y="5559552"/>
+            <a:ext cx="3108960" cy="914400"/>
           </a:xfrm>
           <a:prstGeom prst="rect">
             <a:avLst/>
@@ -22620,8 +23463,8 @@
         </p:nvSpPr>
         <p:spPr>
           <a:xfrm>
-            <a:off x="9692640" y="2103120"/>
-            <a:ext cx="2194560" cy="4206240"/>
+            <a:off x="4343400" y="4416552"/>
+            <a:ext cx="3657600" cy="2057400"/>
           </a:xfrm>
           <a:prstGeom prst="roundRect">
             <a:avLst>
@@ -22668,8 +23511,8 @@
         </p:nvSpPr>
         <p:spPr>
           <a:xfrm>
-            <a:off x="9692640" y="2103120"/>
-            <a:ext cx="2194560" cy="457200"/>
+            <a:off x="4343400" y="4416552"/>
+            <a:ext cx="91440" cy="2057400"/>
           </a:xfrm>
           <a:prstGeom prst="roundRect">
             <a:avLst>
@@ -22714,23 +23557,23 @@
         </p:nvSpPr>
         <p:spPr>
           <a:xfrm>
-            <a:off x="9966960" y="2606040"/>
-            <a:ext cx="1645920" cy="457200"/>
-          </a:xfrm>
-          <a:prstGeom prst="rect">
-            <a:avLst/>
-          </a:prstGeom>
-          <a:noFill/>
-        </p:spPr>
-        <p:txBody>
-          <a:bodyPr wrap="square" lIns="0" rIns="0" tIns="0" bIns="0" anchor="t">
-            <a:spAutoFit/>
-          </a:bodyPr>
-          <a:lstStyle/>
-          <a:p>
-            <a:pPr algn="l"/>
-            <a:r>
-              <a:rPr sz="2200" b="1">
+            <a:off x="4617720" y="4599432"/>
+            <a:ext cx="3108960" cy="365760"/>
+          </a:xfrm>
+          <a:prstGeom prst="rect">
+            <a:avLst/>
+          </a:prstGeom>
+          <a:noFill/>
+        </p:spPr>
+        <p:txBody>
+          <a:bodyPr wrap="square" lIns="0" rIns="0" tIns="0" bIns="0" anchor="t">
+            <a:spAutoFit/>
+          </a:bodyPr>
+          <a:lstStyle/>
+          <a:p>
+            <a:pPr algn="l"/>
+            <a:r>
+              <a:rPr sz="2000" b="1">
                 <a:solidFill>
                   <a:srgbClr val="6E1A30"/>
                 </a:solidFill>
@@ -22749,23 +23592,23 @@
         </p:nvSpPr>
         <p:spPr>
           <a:xfrm>
-            <a:off x="9966960" y="3154680"/>
-            <a:ext cx="1645920" cy="548640"/>
-          </a:xfrm>
-          <a:prstGeom prst="rect">
-            <a:avLst/>
-          </a:prstGeom>
-          <a:noFill/>
-        </p:spPr>
-        <p:txBody>
-          <a:bodyPr wrap="square" lIns="0" rIns="0" tIns="0" bIns="0" anchor="t">
-            <a:spAutoFit/>
-          </a:bodyPr>
-          <a:lstStyle/>
-          <a:p>
-            <a:pPr algn="l"/>
-            <a:r>
-              <a:rPr sz="1800" b="0">
+            <a:off x="4617720" y="5056632"/>
+            <a:ext cx="3108960" cy="457200"/>
+          </a:xfrm>
+          <a:prstGeom prst="rect">
+            <a:avLst/>
+          </a:prstGeom>
+          <a:noFill/>
+        </p:spPr>
+        <p:txBody>
+          <a:bodyPr wrap="square" lIns="0" rIns="0" tIns="0" bIns="0" anchor="t">
+            <a:spAutoFit/>
+          </a:bodyPr>
+          <a:lstStyle/>
+          <a:p>
+            <a:pPr algn="l"/>
+            <a:r>
+              <a:rPr sz="2000" b="0">
                 <a:solidFill>
                   <a:srgbClr val="2A1A14"/>
                 </a:solidFill>
@@ -22784,8 +23627,8 @@
         </p:nvSpPr>
         <p:spPr>
           <a:xfrm>
-            <a:off x="9966960" y="3794760"/>
-            <a:ext cx="1645920" cy="2286000"/>
+            <a:off x="4617720" y="5559552"/>
+            <a:ext cx="3108960" cy="914400"/>
           </a:xfrm>
           <a:prstGeom prst="rect">
             <a:avLst/>
@@ -22813,7 +23656,206 @@
       </p:sp>
       <p:sp>
         <p:nvSpPr>
-          <p:cNvPr id="31" name="TextBox 30"/>
+          <p:cNvPr id="31" name="Rounded Rectangle 30"/>
+          <p:cNvSpPr/>
+          <p:nvPr/>
+        </p:nvSpPr>
+        <p:spPr>
+          <a:xfrm>
+            <a:off x="8138160" y="4416552"/>
+            <a:ext cx="3657600" cy="2057400"/>
+          </a:xfrm>
+          <a:prstGeom prst="roundRect">
+            <a:avLst>
+              <a:gd name="adj" fmla="val 12000"/>
+            </a:avLst>
+          </a:prstGeom>
+          <a:solidFill>
+            <a:srgbClr val="FFFFFF"/>
+          </a:solidFill>
+          <a:ln w="9525">
+            <a:solidFill>
+              <a:srgbClr val="E6D9C0"/>
+            </a:solidFill>
+          </a:ln>
+          <a:effectLst/>
+        </p:spPr>
+        <p:style>
+          <a:lnRef idx="1">
+            <a:schemeClr val="accent1"/>
+          </a:lnRef>
+          <a:fillRef idx="3">
+            <a:schemeClr val="accent1"/>
+          </a:fillRef>
+          <a:effectRef idx="2">
+            <a:schemeClr val="accent1"/>
+          </a:effectRef>
+          <a:fontRef idx="minor">
+            <a:schemeClr val="lt1"/>
+          </a:fontRef>
+        </p:style>
+        <p:txBody>
+          <a:bodyPr rtlCol="0" anchor="ctr"/>
+          <a:lstStyle/>
+          <a:p>
+            <a:pPr algn="ctr"/>
+          </a:p>
+        </p:txBody>
+      </p:sp>
+      <p:sp>
+        <p:nvSpPr>
+          <p:cNvPr id="32" name="Rounded Rectangle 31"/>
+          <p:cNvSpPr/>
+          <p:nvPr/>
+        </p:nvSpPr>
+        <p:spPr>
+          <a:xfrm>
+            <a:off x="8138160" y="4416552"/>
+            <a:ext cx="91440" cy="2057400"/>
+          </a:xfrm>
+          <a:prstGeom prst="roundRect">
+            <a:avLst>
+              <a:gd name="adj" fmla="val 12000"/>
+            </a:avLst>
+          </a:prstGeom>
+          <a:solidFill>
+            <a:srgbClr val="2A1A14"/>
+          </a:solidFill>
+          <a:ln>
+            <a:noFill/>
+          </a:ln>
+          <a:effectLst/>
+        </p:spPr>
+        <p:style>
+          <a:lnRef idx="1">
+            <a:schemeClr val="accent1"/>
+          </a:lnRef>
+          <a:fillRef idx="3">
+            <a:schemeClr val="accent1"/>
+          </a:fillRef>
+          <a:effectRef idx="2">
+            <a:schemeClr val="accent1"/>
+          </a:effectRef>
+          <a:fontRef idx="minor">
+            <a:schemeClr val="lt1"/>
+          </a:fontRef>
+        </p:style>
+        <p:txBody>
+          <a:bodyPr rtlCol="0" anchor="ctr"/>
+          <a:lstStyle/>
+          <a:p>
+            <a:pPr algn="ctr"/>
+          </a:p>
+        </p:txBody>
+      </p:sp>
+      <p:sp>
+        <p:nvSpPr>
+          <p:cNvPr id="33" name="TextBox 32"/>
+          <p:cNvSpPr txBox="1"/>
+          <p:nvPr/>
+        </p:nvSpPr>
+        <p:spPr>
+          <a:xfrm>
+            <a:off x="8412480" y="4599432"/>
+            <a:ext cx="3108960" cy="365760"/>
+          </a:xfrm>
+          <a:prstGeom prst="rect">
+            <a:avLst/>
+          </a:prstGeom>
+          <a:noFill/>
+        </p:spPr>
+        <p:txBody>
+          <a:bodyPr wrap="square" lIns="0" rIns="0" tIns="0" bIns="0" anchor="t">
+            <a:spAutoFit/>
+          </a:bodyPr>
+          <a:lstStyle/>
+          <a:p>
+            <a:pPr algn="l"/>
+            <a:r>
+              <a:rPr sz="2000" b="1">
+                <a:solidFill>
+                  <a:srgbClr val="2A1A14"/>
+                </a:solidFill>
+                <a:latin typeface="Georgia"/>
+              </a:rPr>
+              <a:t>6</a:t>
+            </a:r>
+          </a:p>
+        </p:txBody>
+      </p:sp>
+      <p:sp>
+        <p:nvSpPr>
+          <p:cNvPr id="34" name="TextBox 33"/>
+          <p:cNvSpPr txBox="1"/>
+          <p:nvPr/>
+        </p:nvSpPr>
+        <p:spPr>
+          <a:xfrm>
+            <a:off x="8412480" y="5056632"/>
+            <a:ext cx="3108960" cy="457200"/>
+          </a:xfrm>
+          <a:prstGeom prst="rect">
+            <a:avLst/>
+          </a:prstGeom>
+          <a:noFill/>
+        </p:spPr>
+        <p:txBody>
+          <a:bodyPr wrap="square" lIns="0" rIns="0" tIns="0" bIns="0" anchor="t">
+            <a:spAutoFit/>
+          </a:bodyPr>
+          <a:lstStyle/>
+          <a:p>
+            <a:pPr algn="l"/>
+            <a:r>
+              <a:rPr sz="2000" b="0">
+                <a:solidFill>
+                  <a:srgbClr val="2A1A14"/>
+                </a:solidFill>
+                <a:latin typeface="Georgia"/>
+              </a:rPr>
+              <a:t>El Estudio</a:t>
+            </a:r>
+          </a:p>
+        </p:txBody>
+      </p:sp>
+      <p:sp>
+        <p:nvSpPr>
+          <p:cNvPr id="35" name="TextBox 34"/>
+          <p:cNvSpPr txBox="1"/>
+          <p:nvPr/>
+        </p:nvSpPr>
+        <p:spPr>
+          <a:xfrm>
+            <a:off x="8412480" y="5559552"/>
+            <a:ext cx="3108960" cy="914400"/>
+          </a:xfrm>
+          <a:prstGeom prst="rect">
+            <a:avLst/>
+          </a:prstGeom>
+          <a:noFill/>
+        </p:spPr>
+        <p:txBody>
+          <a:bodyPr wrap="square" lIns="0" rIns="0" tIns="0" bIns="0" anchor="t">
+            <a:spAutoFit/>
+          </a:bodyPr>
+          <a:lstStyle/>
+          <a:p>
+            <a:pPr algn="l"/>
+            <a:r>
+              <a:rPr sz="1100" b="0">
+                <a:solidFill>
+                  <a:srgbClr val="8A7866"/>
+                </a:solidFill>
+                <a:latin typeface="Calibri"/>
+              </a:rPr>
+              <a:t>Internal-facing web admin portal — Atelier editor, translations, calendar, concierge.</a:t>
+            </a:r>
+          </a:p>
+        </p:txBody>
+      </p:sp>
+      <p:sp>
+        <p:nvSpPr>
+          <p:cNvPr id="36" name="TextBox 35"/>
           <p:cNvSpPr txBox="1"/>
           <p:nvPr/>
         </p:nvSpPr>
@@ -22848,7 +23890,7 @@
       </p:sp>
       <p:sp>
         <p:nvSpPr>
-          <p:cNvPr id="32" name="TextBox 31"/>
+          <p:cNvPr id="37" name="TextBox 36"/>
           <p:cNvSpPr txBox="1"/>
           <p:nvPr/>
         </p:nvSpPr>
@@ -22876,7 +23918,7 @@
                 </a:solidFill>
                 <a:latin typeface="Calibri"/>
               </a:rPr>
-              <a:t>4 / 22</a:t>
+              <a:t>4 / 23</a:t>
             </a:r>
           </a:p>
         </p:txBody>
@@ -25780,7 +26822,7 @@
                 </a:solidFill>
                 <a:latin typeface="Calibri"/>
               </a:rPr>
-              <a:t>5 / 22</a:t>
+              <a:t>5 / 23</a:t>
             </a:r>
           </a:p>
         </p:txBody>
@@ -27700,7 +28742,7 @@
                 </a:solidFill>
                 <a:latin typeface="Calibri"/>
               </a:rPr>
-              <a:t>6 / 22</a:t>
+              <a:t>6 / 23</a:t>
             </a:r>
           </a:p>
         </p:txBody>
@@ -29292,7 +30334,7 @@
                 </a:solidFill>
                 <a:latin typeface="Calibri"/>
               </a:rPr>
-              <a:t>7 / 22</a:t>
+              <a:t>7 / 23</a:t>
             </a:r>
           </a:p>
         </p:txBody>
@@ -30608,7 +31650,7 @@
                 </a:solidFill>
                 <a:latin typeface="Calibri"/>
               </a:rPr>
-              <a:t>8 / 22</a:t>
+              <a:t>8 / 23</a:t>
             </a:r>
           </a:p>
         </p:txBody>
@@ -32059,7 +33101,7 @@
                 </a:solidFill>
                 <a:latin typeface="Calibri"/>
               </a:rPr>
-              <a:t>9 / 22</a:t>
+              <a:t>9 / 23</a:t>
             </a:r>
           </a:p>
         </p:txBody>
